--- a/slides/4.Decision/Decision.pptx
+++ b/slides/4.Decision/Decision.pptx
@@ -8580,7 +8580,7 @@
               <a:buNone/>
             </a:pPr>
             <a:r>
-              <a:rPr lang="en-US" dirty="0">
+              <a:rPr lang="en-US" sz="2400" dirty="0">
                 <a:solidFill>
                   <a:schemeClr val="accent2"/>
                 </a:solidFill>
@@ -8588,14 +8588,14 @@
               <a:t>Banking Operations</a:t>
             </a:r>
             <a:r>
-              <a:rPr lang="en" dirty="0">
+              <a:rPr lang="en" sz="2400" dirty="0">
                 <a:solidFill>
                   <a:schemeClr val="accent2"/>
                 </a:solidFill>
               </a:rPr>
               <a:t>;</a:t>
             </a:r>
-            <a:endParaRPr dirty="0">
+            <a:endParaRPr sz="2400" dirty="0">
               <a:solidFill>
                 <a:schemeClr val="accent2"/>
               </a:solidFill>
@@ -8811,9 +8811,12 @@
               </a:spcAft>
             </a:pPr>
             <a:r>
-              <a:rPr lang="en-US" sz="1600" dirty="0">
-                <a:solidFill>
-                  <a:schemeClr val="bg2"/>
+              <a:rPr lang="en-US" dirty="0">
+                <a:solidFill>
+                  <a:schemeClr val="accent1">
+                    <a:lumMod val="60000"/>
+                    <a:lumOff val="40000"/>
+                  </a:schemeClr>
                 </a:solidFill>
                 <a:latin typeface="Fira Code"/>
                 <a:ea typeface="Fira Code"/>
@@ -8832,9 +8835,12 @@
                 <a:spcPts val="0"/>
               </a:spcAft>
             </a:pPr>
-            <a:endParaRPr lang="en-US" sz="1600" dirty="0">
+            <a:endParaRPr lang="en-US" dirty="0">
               <a:solidFill>
-                <a:schemeClr val="bg2"/>
+                <a:schemeClr val="accent1">
+                  <a:lumMod val="60000"/>
+                  <a:lumOff val="40000"/>
+                </a:schemeClr>
               </a:solidFill>
               <a:latin typeface="Fira Code"/>
               <a:ea typeface="Fira Code"/>
@@ -8852,9 +8858,12 @@
               </a:spcAft>
             </a:pPr>
             <a:r>
-              <a:rPr lang="en-US" sz="1600" dirty="0">
-                <a:solidFill>
-                  <a:schemeClr val="bg2"/>
+              <a:rPr lang="en-US" dirty="0">
+                <a:solidFill>
+                  <a:schemeClr val="accent1">
+                    <a:lumMod val="60000"/>
+                    <a:lumOff val="40000"/>
+                  </a:schemeClr>
                 </a:solidFill>
                 <a:latin typeface="Fira Code"/>
                 <a:ea typeface="Fira Code"/>
@@ -9263,7 +9272,7 @@
               <a:buNone/>
             </a:pPr>
             <a:r>
-              <a:rPr lang="en-US" dirty="0">
+              <a:rPr lang="en-US" sz="2400" dirty="0">
                 <a:solidFill>
                   <a:schemeClr val="accent2"/>
                 </a:solidFill>
@@ -9271,14 +9280,14 @@
               <a:t>Banking Operations</a:t>
             </a:r>
             <a:r>
-              <a:rPr lang="en" dirty="0">
+              <a:rPr lang="en" sz="2400" dirty="0">
                 <a:solidFill>
                   <a:schemeClr val="accent2"/>
                 </a:solidFill>
               </a:rPr>
               <a:t>;</a:t>
             </a:r>
-            <a:endParaRPr dirty="0">
+            <a:endParaRPr sz="2400" dirty="0">
               <a:solidFill>
                 <a:schemeClr val="accent2"/>
               </a:solidFill>
@@ -9485,6 +9494,53 @@
           </a:bodyPr>
           <a:lstStyle/>
           <a:p>
+            <a:pPr lvl="0" algn="just" rtl="0">
+              <a:spcBef>
+                <a:spcPts val="0"/>
+              </a:spcBef>
+              <a:spcAft>
+                <a:spcPts val="0"/>
+              </a:spcAft>
+            </a:pPr>
+            <a:endParaRPr lang="en-US" dirty="0">
+              <a:solidFill>
+                <a:schemeClr val="accent1">
+                  <a:lumMod val="60000"/>
+                  <a:lumOff val="40000"/>
+                </a:schemeClr>
+              </a:solidFill>
+              <a:latin typeface="Fira Code"/>
+              <a:ea typeface="Fira Code"/>
+              <a:cs typeface="Fira Code"/>
+              <a:sym typeface="Fira Code"/>
+            </a:endParaRPr>
+          </a:p>
+          <a:p>
+            <a:pPr lvl="0" algn="just" rtl="0">
+              <a:spcBef>
+                <a:spcPts val="0"/>
+              </a:spcBef>
+              <a:spcAft>
+                <a:spcPts val="0"/>
+              </a:spcAft>
+            </a:pPr>
+            <a:r>
+              <a:rPr lang="en-US" dirty="0">
+                <a:solidFill>
+                  <a:schemeClr val="accent1">
+                    <a:lumMod val="60000"/>
+                    <a:lumOff val="40000"/>
+                  </a:schemeClr>
+                </a:solidFill>
+                <a:latin typeface="Fira Code"/>
+                <a:ea typeface="Fira Code"/>
+                <a:cs typeface="Fira Code"/>
+                <a:sym typeface="Fira Code"/>
+              </a:rPr>
+              <a:t>Options 2: should ask the user to enter a withdrawal amount.</a:t>
+            </a:r>
+          </a:p>
+          <a:p>
             <a:pPr marL="285750" lvl="0" indent="-285750" algn="just" rtl="0">
               <a:spcBef>
                 <a:spcPts val="0"/>
@@ -9515,28 +9571,28 @@
               </a:spcAft>
             </a:pPr>
             <a:r>
-              <a:rPr lang="en-US" sz="1600" dirty="0">
-                <a:solidFill>
-                  <a:schemeClr val="bg2"/>
+              <a:rPr lang="en-US" dirty="0">
+                <a:solidFill>
+                  <a:schemeClr val="bg1">
+                    <a:lumMod val="75000"/>
+                  </a:schemeClr>
                 </a:solidFill>
                 <a:latin typeface="Fira Code"/>
                 <a:ea typeface="Fira Code"/>
                 <a:cs typeface="Fira Code"/>
                 <a:sym typeface="Fira Code"/>
               </a:rPr>
-              <a:t>Options 2: should ask the user to enter a withdrawal amount.</a:t>
+              <a:t>Only allow the withdrawal of 100, 200, or 500 units.</a:t>
             </a:r>
           </a:p>
           <a:p>
-            <a:pPr marL="285750" lvl="0" indent="-285750" algn="just" rtl="0">
-              <a:spcBef>
-                <a:spcPts val="0"/>
-              </a:spcBef>
-              <a:spcAft>
-                <a:spcPts val="0"/>
-              </a:spcAft>
-              <a:buFont typeface="Arial" panose="020B0604020202020204" pitchFamily="34" charset="0"/>
-              <a:buChar char="•"/>
+            <a:pPr lvl="0" algn="just" rtl="0">
+              <a:spcBef>
+                <a:spcPts val="0"/>
+              </a:spcBef>
+              <a:spcAft>
+                <a:spcPts val="0"/>
+              </a:spcAft>
             </a:pPr>
             <a:endParaRPr lang="en-US" sz="1600" dirty="0">
               <a:solidFill>
@@ -9558,16 +9614,38 @@
               </a:spcAft>
             </a:pPr>
             <a:r>
-              <a:rPr lang="en-US" sz="1600" dirty="0">
-                <a:solidFill>
-                  <a:schemeClr val="bg1"/>
+              <a:rPr lang="en-US" dirty="0">
+                <a:solidFill>
+                  <a:srgbClr val="92D050"/>
                 </a:solidFill>
                 <a:latin typeface="Fira Code"/>
                 <a:ea typeface="Fira Code"/>
                 <a:cs typeface="Fira Code"/>
                 <a:sym typeface="Fira Code"/>
               </a:rPr>
-              <a:t>Only allow the withdrawal of 100, 200, or 500 units.</a:t>
+              <a:t>Check if the balance is sufficient.</a:t>
+            </a:r>
+          </a:p>
+          <a:p>
+            <a:pPr lvl="0" algn="just" rtl="0">
+              <a:spcBef>
+                <a:spcPts val="0"/>
+              </a:spcBef>
+              <a:spcAft>
+                <a:spcPts val="0"/>
+              </a:spcAft>
+            </a:pPr>
+            <a:r>
+              <a:rPr lang="en-US" dirty="0">
+                <a:solidFill>
+                  <a:srgbClr val="92D050"/>
+                </a:solidFill>
+                <a:latin typeface="Fira Code"/>
+                <a:ea typeface="Fira Code"/>
+                <a:cs typeface="Fira Code"/>
+                <a:sym typeface="Fira Code"/>
+              </a:rPr>
+              <a:t>If valid, deduct the amount and display the new balance.</a:t>
             </a:r>
           </a:p>
           <a:p>
@@ -9583,7 +9661,7 @@
             </a:pPr>
             <a:endParaRPr lang="en-US" sz="1600" dirty="0">
               <a:solidFill>
-                <a:schemeClr val="bg2"/>
+                <a:srgbClr val="92D050"/>
               </a:solidFill>
               <a:latin typeface="Fira Code"/>
               <a:ea typeface="Fira Code"/>
@@ -9601,41 +9679,17 @@
               </a:spcAft>
             </a:pPr>
             <a:r>
-              <a:rPr lang="en-US" sz="1600" dirty="0">
-                <a:solidFill>
-                  <a:schemeClr val="bg2"/>
+              <a:rPr lang="en-US" dirty="0">
+                <a:solidFill>
+                  <a:srgbClr val="92D050"/>
                 </a:solidFill>
                 <a:latin typeface="Fira Code"/>
                 <a:ea typeface="Fira Code"/>
                 <a:cs typeface="Fira Code"/>
                 <a:sym typeface="Fira Code"/>
               </a:rPr>
-              <a:t>Check if the balance is </a:t>
+              <a:t>If not, show an "Insufficient funds" message.</a:t>
             </a:r>
-            <a:r>
-              <a:rPr lang="en-US" sz="1600" dirty="0">
-                <a:solidFill>
-                  <a:srgbClr val="92D050"/>
-                </a:solidFill>
-                <a:latin typeface="Fira Code"/>
-                <a:ea typeface="Fira Code"/>
-                <a:cs typeface="Fira Code"/>
-                <a:sym typeface="Fira Code"/>
-              </a:rPr>
-              <a:t>sufficient</a:t>
-            </a:r>
-            <a:r>
-              <a:rPr lang="en-US" sz="1600" dirty="0">
-                <a:solidFill>
-                  <a:schemeClr val="bg2"/>
-                </a:solidFill>
-                <a:latin typeface="Fira Code"/>
-                <a:ea typeface="Fira Code"/>
-                <a:cs typeface="Fira Code"/>
-                <a:sym typeface="Fira Code"/>
-              </a:rPr>
-              <a:t>.</a:t>
-            </a:r>
           </a:p>
           <a:p>
             <a:pPr lvl="0" algn="just" rtl="0">
@@ -9646,57 +9700,9 @@
                 <a:spcPts val="0"/>
               </a:spcAft>
             </a:pPr>
-            <a:r>
-              <a:rPr lang="en-US" sz="1600" dirty="0">
-                <a:solidFill>
-                  <a:schemeClr val="bg2"/>
-                </a:solidFill>
-                <a:latin typeface="Fira Code"/>
-                <a:ea typeface="Fira Code"/>
-                <a:cs typeface="Fira Code"/>
-                <a:sym typeface="Fira Code"/>
-              </a:rPr>
-              <a:t>If valid, </a:t>
-            </a:r>
-            <a:r>
-              <a:rPr lang="en-US" sz="1600" dirty="0">
-                <a:solidFill>
-                  <a:srgbClr val="92D050"/>
-                </a:solidFill>
-                <a:latin typeface="Fira Code"/>
-                <a:ea typeface="Fira Code"/>
-                <a:cs typeface="Fira Code"/>
-                <a:sym typeface="Fira Code"/>
-              </a:rPr>
-              <a:t>deduct the amount and display the new </a:t>
-            </a:r>
-            <a:r>
-              <a:rPr lang="en-US" sz="1600" dirty="0">
-                <a:solidFill>
-                  <a:schemeClr val="bg2"/>
-                </a:solidFill>
-                <a:latin typeface="Fira Code"/>
-                <a:ea typeface="Fira Code"/>
-                <a:cs typeface="Fira Code"/>
-                <a:sym typeface="Fira Code"/>
-              </a:rPr>
-              <a:t>balance.</a:t>
-            </a:r>
-          </a:p>
-          <a:p>
-            <a:pPr marL="285750" lvl="0" indent="-285750" algn="just" rtl="0">
-              <a:spcBef>
-                <a:spcPts val="0"/>
-              </a:spcBef>
-              <a:spcAft>
-                <a:spcPts val="0"/>
-              </a:spcAft>
-              <a:buFont typeface="Arial" panose="020B0604020202020204" pitchFamily="34" charset="0"/>
-              <a:buChar char="•"/>
-            </a:pPr>
-            <a:endParaRPr lang="en-US" sz="1600" dirty="0">
+            <a:endParaRPr lang="en-US" dirty="0">
               <a:solidFill>
-                <a:schemeClr val="bg2"/>
+                <a:srgbClr val="92D050"/>
               </a:solidFill>
               <a:latin typeface="Fira Code"/>
               <a:ea typeface="Fira Code"/>
@@ -9714,93 +9720,16 @@
               </a:spcAft>
             </a:pPr>
             <a:r>
-              <a:rPr lang="en-US" sz="1600" dirty="0">
-                <a:solidFill>
-                  <a:schemeClr val="bg2"/>
+              <a:rPr lang="en-US" dirty="0">
+                <a:solidFill>
+                  <a:srgbClr val="92D050"/>
                 </a:solidFill>
                 <a:latin typeface="Fira Code"/>
                 <a:ea typeface="Fira Code"/>
                 <a:cs typeface="Fira Code"/>
                 <a:sym typeface="Fira Code"/>
               </a:rPr>
-              <a:t>If not, show an "</a:t>
-            </a:r>
-            <a:r>
-              <a:rPr lang="en-US" sz="1600" dirty="0">
-                <a:solidFill>
-                  <a:srgbClr val="92D050"/>
-                </a:solidFill>
-                <a:latin typeface="Fira Code"/>
-                <a:ea typeface="Fira Code"/>
-                <a:cs typeface="Fira Code"/>
-                <a:sym typeface="Fira Code"/>
-              </a:rPr>
-              <a:t>Insufficient funds</a:t>
-            </a:r>
-            <a:r>
-              <a:rPr lang="en-US" sz="1600" dirty="0">
-                <a:solidFill>
-                  <a:schemeClr val="bg2"/>
-                </a:solidFill>
-                <a:latin typeface="Fira Code"/>
-                <a:ea typeface="Fira Code"/>
-                <a:cs typeface="Fira Code"/>
-                <a:sym typeface="Fira Code"/>
-              </a:rPr>
-              <a:t>" message.</a:t>
-            </a:r>
-          </a:p>
-          <a:p>
-            <a:pPr lvl="0" algn="just" rtl="0">
-              <a:spcBef>
-                <a:spcPts val="0"/>
-              </a:spcBef>
-              <a:spcAft>
-                <a:spcPts val="0"/>
-              </a:spcAft>
-            </a:pPr>
-            <a:endParaRPr lang="en-US" sz="1600" dirty="0">
-              <a:solidFill>
-                <a:schemeClr val="bg2"/>
-              </a:solidFill>
-              <a:latin typeface="Fira Code"/>
-              <a:ea typeface="Fira Code"/>
-              <a:cs typeface="Fira Code"/>
-              <a:sym typeface="Fira Code"/>
-            </a:endParaRPr>
-          </a:p>
-          <a:p>
-            <a:pPr lvl="0" algn="just" rtl="0">
-              <a:spcBef>
-                <a:spcPts val="0"/>
-              </a:spcBef>
-              <a:spcAft>
-                <a:spcPts val="0"/>
-              </a:spcAft>
-            </a:pPr>
-            <a:r>
-              <a:rPr lang="en-US" sz="1600" dirty="0">
-                <a:solidFill>
-                  <a:schemeClr val="bg2"/>
-                </a:solidFill>
-                <a:latin typeface="Fira Code"/>
-                <a:ea typeface="Fira Code"/>
-                <a:cs typeface="Fira Code"/>
-                <a:sym typeface="Fira Code"/>
-              </a:rPr>
-              <a:t>   If an invalid amount is entered, show an </a:t>
-            </a:r>
-            <a:r>
-              <a:rPr lang="en-US" sz="1600" dirty="0">
-                <a:solidFill>
-                  <a:srgbClr val="92D050"/>
-                </a:solidFill>
-                <a:latin typeface="Fira Code"/>
-                <a:ea typeface="Fira Code"/>
-                <a:cs typeface="Fira Code"/>
-                <a:sym typeface="Fira Code"/>
-              </a:rPr>
-              <a:t>"Invalid    amount" message.</a:t>
+              <a:t>If an invalid amount is entered, show an "Invalid amount" message.</a:t>
             </a:r>
           </a:p>
         </p:txBody>
@@ -10414,7 +10343,7 @@
             <a:r>
               <a:rPr lang="en-US" sz="1600" dirty="0">
                 <a:solidFill>
-                  <a:schemeClr val="bg2"/>
+                  <a:schemeClr val="accent1"/>
                 </a:solidFill>
                 <a:latin typeface="Fira Code"/>
                 <a:ea typeface="Fira Code"/>
@@ -10435,7 +10364,7 @@
             </a:pPr>
             <a:endParaRPr lang="en-US" sz="1600" dirty="0">
               <a:solidFill>
-                <a:schemeClr val="bg2"/>
+                <a:schemeClr val="accent1"/>
               </a:solidFill>
               <a:latin typeface="Fira Code"/>
               <a:ea typeface="Fira Code"/>
@@ -10455,7 +10384,7 @@
             <a:r>
               <a:rPr lang="en-US" sz="1600" dirty="0">
                 <a:solidFill>
-                  <a:schemeClr val="bg2"/>
+                  <a:schemeClr val="accent1"/>
                 </a:solidFill>
                 <a:latin typeface="Fira Code"/>
                 <a:ea typeface="Fira Code"/>
@@ -11920,7 +11849,7 @@
               <a:buNone/>
             </a:pPr>
             <a:r>
-              <a:rPr lang="en-US" dirty="0">
+              <a:rPr lang="en-US" sz="2400" dirty="0">
                 <a:solidFill>
                   <a:schemeClr val="accent2"/>
                 </a:solidFill>
@@ -11928,14 +11857,14 @@
               <a:t>Angles and Positions</a:t>
             </a:r>
             <a:r>
-              <a:rPr lang="en" dirty="0">
+              <a:rPr lang="en" sz="2400" dirty="0">
                 <a:solidFill>
                   <a:schemeClr val="accent2"/>
                 </a:solidFill>
               </a:rPr>
               <a:t>;</a:t>
             </a:r>
-            <a:endParaRPr dirty="0">
+            <a:endParaRPr sz="2400" dirty="0">
               <a:solidFill>
                 <a:schemeClr val="accent2"/>
               </a:solidFill>
@@ -12069,8 +11998,8 @@
         </p:nvSpPr>
         <p:spPr>
           <a:xfrm>
-            <a:off x="1060931" y="1002893"/>
-            <a:ext cx="7708495" cy="1714611"/>
+            <a:off x="1096327" y="794102"/>
+            <a:ext cx="7970981" cy="1404825"/>
           </a:xfrm>
           <a:prstGeom prst="rect">
             <a:avLst/>
@@ -12096,6 +12025,18 @@
               <a:buNone/>
             </a:pPr>
             <a:r>
+              <a:rPr lang="en-US" sz="1600" dirty="0">
+                <a:solidFill>
+                  <a:schemeClr val="accent1"/>
+                </a:solidFill>
+                <a:latin typeface="Fira Code"/>
+                <a:ea typeface="Fira Code"/>
+                <a:cs typeface="Fira Code"/>
+                <a:sym typeface="Fira Code"/>
+              </a:rPr>
+              <a:t>Write a program that takes an angle value as input (in degrees) and determines the position of that angle on the unit circle</a:t>
+            </a:r>
+            <a:r>
               <a:rPr lang="en-US" sz="2000" dirty="0">
                 <a:solidFill>
                   <a:schemeClr val="accent1"/>
@@ -12105,7 +12046,7 @@
                 <a:cs typeface="Fira Code"/>
                 <a:sym typeface="Fira Code"/>
               </a:rPr>
-              <a:t>Write a program that takes an angle value as input (in degrees) and determines the position of that angle on the unit circle.</a:t>
+              <a:t>.</a:t>
             </a:r>
           </a:p>
         </p:txBody>
@@ -13223,7 +13164,7 @@
               <a:buNone/>
             </a:pPr>
             <a:r>
-              <a:rPr lang="en-US" dirty="0">
+              <a:rPr lang="en-US" sz="2400" dirty="0">
                 <a:solidFill>
                   <a:schemeClr val="accent2"/>
                 </a:solidFill>
@@ -13231,14 +13172,14 @@
               <a:t>Banking Operations</a:t>
             </a:r>
             <a:r>
-              <a:rPr lang="en" dirty="0">
+              <a:rPr lang="en" sz="2400" dirty="0">
                 <a:solidFill>
                   <a:schemeClr val="accent2"/>
                 </a:solidFill>
               </a:rPr>
               <a:t>;</a:t>
             </a:r>
-            <a:endParaRPr dirty="0">
+            <a:endParaRPr sz="2400" dirty="0">
               <a:solidFill>
                 <a:schemeClr val="accent2"/>
               </a:solidFill>
@@ -13372,7 +13313,7 @@
         </p:nvSpPr>
         <p:spPr>
           <a:xfrm>
-            <a:off x="1220368" y="1213684"/>
+            <a:off x="1143250" y="1025943"/>
             <a:ext cx="7482957" cy="1020553"/>
           </a:xfrm>
           <a:prstGeom prst="rect">
@@ -13399,7 +13340,7 @@
               <a:buNone/>
             </a:pPr>
             <a:r>
-              <a:rPr lang="en-US" sz="2000" dirty="0">
+              <a:rPr lang="en-US" sz="1600" dirty="0">
                 <a:solidFill>
                   <a:schemeClr val="accent1"/>
                 </a:solidFill>
@@ -14083,7 +14024,7 @@
               <a:buNone/>
             </a:pPr>
             <a:r>
-              <a:rPr lang="en-US" dirty="0">
+              <a:rPr lang="en-US" sz="2400" dirty="0">
                 <a:solidFill>
                   <a:schemeClr val="accent2"/>
                 </a:solidFill>
@@ -14091,14 +14032,14 @@
               <a:t>Banking Operations</a:t>
             </a:r>
             <a:r>
-              <a:rPr lang="en" dirty="0">
+              <a:rPr lang="en" sz="2400" dirty="0">
                 <a:solidFill>
                   <a:schemeClr val="accent2"/>
                 </a:solidFill>
               </a:rPr>
               <a:t>;</a:t>
             </a:r>
-            <a:endParaRPr dirty="0">
+            <a:endParaRPr sz="2400" dirty="0">
               <a:solidFill>
                 <a:schemeClr val="accent2"/>
               </a:solidFill>
@@ -14232,7 +14173,7 @@
         </p:nvSpPr>
         <p:spPr>
           <a:xfrm>
-            <a:off x="1143250" y="1432196"/>
+            <a:off x="1143250" y="1123900"/>
             <a:ext cx="7708495" cy="1714611"/>
           </a:xfrm>
           <a:prstGeom prst="rect">
@@ -14259,7 +14200,7 @@
               <a:buNone/>
             </a:pPr>
             <a:r>
-              <a:rPr lang="en-US" sz="2000" dirty="0">
+              <a:rPr lang="en-US" dirty="0">
                 <a:solidFill>
                   <a:schemeClr val="accent1"/>
                 </a:solidFill>
@@ -14282,7 +14223,7 @@
               <a:buNone/>
             </a:pPr>
             <a:r>
-              <a:rPr lang="en-US" sz="2000" dirty="0">
+              <a:rPr lang="en-US" dirty="0">
                 <a:solidFill>
                   <a:schemeClr val="accent1"/>
                 </a:solidFill>
@@ -14304,7 +14245,7 @@
               </a:spcAft>
               <a:buNone/>
             </a:pPr>
-            <a:endParaRPr lang="en-US" sz="2000" dirty="0">
+            <a:endParaRPr lang="en-US" dirty="0">
               <a:solidFill>
                 <a:schemeClr val="accent1"/>
               </a:solidFill>
@@ -14325,7 +14266,7 @@
               <a:buNone/>
             </a:pPr>
             <a:r>
-              <a:rPr lang="en-US" sz="2000" dirty="0">
+              <a:rPr lang="en-US" dirty="0">
                 <a:solidFill>
                   <a:srgbClr val="92D050"/>
                 </a:solidFill>
@@ -15009,7 +14950,7 @@
               <a:buNone/>
             </a:pPr>
             <a:r>
-              <a:rPr lang="en-US" dirty="0">
+              <a:rPr lang="en-US" sz="2400" dirty="0">
                 <a:solidFill>
                   <a:schemeClr val="accent2"/>
                 </a:solidFill>
@@ -15017,14 +14958,14 @@
               <a:t>Banking Operations</a:t>
             </a:r>
             <a:r>
-              <a:rPr lang="en" dirty="0">
+              <a:rPr lang="en" sz="2400" dirty="0">
                 <a:solidFill>
                   <a:schemeClr val="accent2"/>
                 </a:solidFill>
               </a:rPr>
               <a:t>;</a:t>
             </a:r>
-            <a:endParaRPr dirty="0">
+            <a:endParaRPr sz="2400" dirty="0">
               <a:solidFill>
                 <a:schemeClr val="accent2"/>
               </a:solidFill>
@@ -15214,7 +15155,7 @@
         </p:nvSpPr>
         <p:spPr>
           <a:xfrm>
-            <a:off x="1330537" y="1257775"/>
+            <a:off x="1212550" y="954760"/>
             <a:ext cx="7482957" cy="1020553"/>
           </a:xfrm>
           <a:prstGeom prst="rect">
@@ -15241,7 +15182,7 @@
               <a:buNone/>
             </a:pPr>
             <a:r>
-              <a:rPr lang="en-US" sz="2000" dirty="0">
+              <a:rPr lang="en-US" dirty="0">
                 <a:solidFill>
                   <a:schemeClr val="accent1"/>
                 </a:solidFill>
@@ -15678,7 +15619,7 @@
               <a:buNone/>
             </a:pPr>
             <a:r>
-              <a:rPr lang="en-US" dirty="0">
+              <a:rPr lang="en-US" sz="2400" dirty="0">
                 <a:solidFill>
                   <a:schemeClr val="accent2"/>
                 </a:solidFill>
@@ -15686,14 +15627,14 @@
               <a:t>Banking Operations</a:t>
             </a:r>
             <a:r>
-              <a:rPr lang="en" dirty="0">
+              <a:rPr lang="en" sz="2400" dirty="0">
                 <a:solidFill>
                   <a:schemeClr val="accent2"/>
                 </a:solidFill>
               </a:rPr>
               <a:t>;</a:t>
             </a:r>
-            <a:endParaRPr dirty="0">
+            <a:endParaRPr sz="2400" dirty="0">
               <a:solidFill>
                 <a:schemeClr val="accent2"/>
               </a:solidFill>
@@ -15883,8 +15824,8 @@
         </p:nvSpPr>
         <p:spPr>
           <a:xfrm>
-            <a:off x="1330537" y="1257775"/>
-            <a:ext cx="7482957" cy="1020553"/>
+            <a:off x="1110456" y="1009647"/>
+            <a:ext cx="7804943" cy="1020553"/>
           </a:xfrm>
           <a:prstGeom prst="rect">
             <a:avLst/>
@@ -15910,7 +15851,7 @@
               <a:buNone/>
             </a:pPr>
             <a:r>
-              <a:rPr lang="en-US" sz="2000" dirty="0">
+              <a:rPr lang="en-US" sz="1600" dirty="0">
                 <a:solidFill>
                   <a:schemeClr val="accent1"/>
                 </a:solidFill>
@@ -15972,7 +15913,7 @@
               <a:buChar char="•"/>
             </a:pPr>
             <a:r>
-              <a:rPr lang="en-US" sz="1800" dirty="0">
+              <a:rPr lang="en-US" dirty="0">
                 <a:solidFill>
                   <a:srgbClr val="92D050"/>
                 </a:solidFill>
@@ -16034,7 +15975,7 @@
               <a:buChar char="•"/>
             </a:pPr>
             <a:r>
-              <a:rPr lang="en-US" sz="1800" dirty="0">
+              <a:rPr lang="en-US" dirty="0">
                 <a:solidFill>
                   <a:srgbClr val="92D050"/>
                 </a:solidFill>
@@ -16511,7 +16452,7 @@
               <a:buNone/>
             </a:pPr>
             <a:r>
-              <a:rPr lang="en-US" dirty="0">
+              <a:rPr lang="en-US" sz="2400" dirty="0">
                 <a:solidFill>
                   <a:schemeClr val="accent2"/>
                 </a:solidFill>
@@ -16519,14 +16460,14 @@
               <a:t>Banking Operations</a:t>
             </a:r>
             <a:r>
-              <a:rPr lang="en" dirty="0">
+              <a:rPr lang="en" sz="2400" dirty="0">
                 <a:solidFill>
                   <a:schemeClr val="accent2"/>
                 </a:solidFill>
               </a:rPr>
               <a:t>;</a:t>
             </a:r>
-            <a:endParaRPr dirty="0">
+            <a:endParaRPr sz="2400" dirty="0">
               <a:solidFill>
                 <a:schemeClr val="accent2"/>
               </a:solidFill>
@@ -16743,7 +16684,7 @@
               <a:buNone/>
             </a:pPr>
             <a:r>
-              <a:rPr lang="en-US" sz="2000" dirty="0">
+              <a:rPr lang="en-US" dirty="0">
                 <a:solidFill>
                   <a:schemeClr val="accent1"/>
                 </a:solidFill>
@@ -16788,18 +16729,16 @@
           </a:bodyPr>
           <a:lstStyle/>
           <a:p>
-            <a:pPr marL="342900" lvl="0" indent="-342900" algn="l" rtl="0">
-              <a:spcBef>
-                <a:spcPts val="0"/>
-              </a:spcBef>
-              <a:spcAft>
-                <a:spcPts val="0"/>
-              </a:spcAft>
-              <a:buFont typeface="Arial" panose="020B0604020202020204" pitchFamily="34" charset="0"/>
-              <a:buChar char="•"/>
+            <a:pPr lvl="0" algn="l" rtl="0">
+              <a:spcBef>
+                <a:spcPts val="0"/>
+              </a:spcBef>
+              <a:spcAft>
+                <a:spcPts val="0"/>
+              </a:spcAft>
             </a:pPr>
             <a:r>
-              <a:rPr lang="en-US" sz="1600" dirty="0">
+              <a:rPr lang="en-US" dirty="0">
                 <a:solidFill>
                   <a:srgbClr val="92D050"/>
                 </a:solidFill>
@@ -16844,18 +16783,16 @@
           </a:bodyPr>
           <a:lstStyle/>
           <a:p>
-            <a:pPr marL="342900" lvl="0" indent="-342900" algn="l" rtl="0">
-              <a:spcBef>
-                <a:spcPts val="0"/>
-              </a:spcBef>
-              <a:spcAft>
-                <a:spcPts val="0"/>
-              </a:spcAft>
-              <a:buFont typeface="Arial" panose="020B0604020202020204" pitchFamily="34" charset="0"/>
-              <a:buChar char="•"/>
+            <a:pPr lvl="0" algn="l" rtl="0">
+              <a:spcBef>
+                <a:spcPts val="0"/>
+              </a:spcBef>
+              <a:spcAft>
+                <a:spcPts val="0"/>
+              </a:spcAft>
             </a:pPr>
             <a:r>
-              <a:rPr lang="en-US" sz="1600" dirty="0">
+              <a:rPr lang="en-US" dirty="0">
                 <a:solidFill>
                   <a:srgbClr val="92D050"/>
                 </a:solidFill>
@@ -16867,9 +16804,12 @@
               <a:t>You can use ‘</a:t>
             </a:r>
             <a:r>
-              <a:rPr lang="en-US" sz="1600" dirty="0">
-                <a:solidFill>
-                  <a:srgbClr val="00B0F0"/>
+              <a:rPr lang="en-US" dirty="0">
+                <a:solidFill>
+                  <a:schemeClr val="accent1">
+                    <a:lumMod val="60000"/>
+                    <a:lumOff val="40000"/>
+                  </a:schemeClr>
                 </a:solidFill>
                 <a:latin typeface="Fira Code"/>
                 <a:ea typeface="Fira Code"/>
@@ -16879,7 +16819,7 @@
               <a:t>switch-case</a:t>
             </a:r>
             <a:r>
-              <a:rPr lang="en-US" sz="1600" dirty="0">
+              <a:rPr lang="en-US" dirty="0">
                 <a:solidFill>
                   <a:srgbClr val="92D050"/>
                 </a:solidFill>

--- a/slides/4.Decision/Decision.pptx
+++ b/slides/4.Decision/Decision.pptx
@@ -5,7 +5,7 @@
     <p:sldMasterId id="2147483672" r:id="rId1"/>
   </p:sldMasterIdLst>
   <p:notesMasterIdLst>
-    <p:notesMasterId r:id="rId14"/>
+    <p:notesMasterId r:id="rId16"/>
   </p:notesMasterIdLst>
   <p:sldIdLst>
     <p:sldId id="256" r:id="rId2"/>
@@ -20,14 +20,16 @@
     <p:sldId id="306" r:id="rId11"/>
     <p:sldId id="308" r:id="rId12"/>
     <p:sldId id="309" r:id="rId13"/>
+    <p:sldId id="311" r:id="rId14"/>
+    <p:sldId id="310" r:id="rId15"/>
   </p:sldIdLst>
   <p:sldSz cx="9144000" cy="5143500" type="screen16x9"/>
   <p:notesSz cx="6858000" cy="9144000"/>
   <p:embeddedFontLst>
     <p:embeddedFont>
       <p:font typeface="Fira Code" panose="020B0809050000020004" pitchFamily="49" charset="0"/>
-      <p:regular r:id="rId15"/>
-      <p:bold r:id="rId16"/>
+      <p:regular r:id="rId17"/>
+      <p:bold r:id="rId18"/>
     </p:embeddedFont>
   </p:embeddedFontLst>
   <p:defaultTextStyle>
@@ -1184,6 +1186,260 @@
     <p:extLst>
       <p:ext uri="{BB962C8B-B14F-4D97-AF65-F5344CB8AC3E}">
         <p14:creationId xmlns:p14="http://schemas.microsoft.com/office/powerpoint/2010/main" val="2868130531"/>
+      </p:ext>
+    </p:extLst>
+  </p:cSld>
+  <p:clrMapOvr>
+    <a:masterClrMapping/>
+  </p:clrMapOvr>
+</p:notes>
+</file>
+
+<file path=ppt/notesSlides/notesSlide13.xml><?xml version="1.0" encoding="utf-8"?>
+<p:notes xmlns:a="http://schemas.openxmlformats.org/drawingml/2006/main" xmlns:r="http://schemas.openxmlformats.org/officeDocument/2006/relationships" xmlns:p="http://schemas.openxmlformats.org/presentationml/2006/main" showMasterSp="0" showMasterPhAnim="0">
+  <p:cSld>
+    <p:spTree>
+      <p:nvGrpSpPr>
+        <p:cNvPr id="1" name="Shape 467">
+          <a:extLst>
+            <a:ext uri="{FF2B5EF4-FFF2-40B4-BE49-F238E27FC236}">
+              <a16:creationId xmlns:a16="http://schemas.microsoft.com/office/drawing/2014/main" id="{E25409D6-0791-CCF1-DDC1-E38F23BA9758}"/>
+            </a:ext>
+          </a:extLst>
+        </p:cNvPr>
+        <p:cNvGrpSpPr/>
+        <p:nvPr/>
+      </p:nvGrpSpPr>
+      <p:grpSpPr>
+        <a:xfrm>
+          <a:off x="0" y="0"/>
+          <a:ext cx="0" cy="0"/>
+          <a:chOff x="0" y="0"/>
+          <a:chExt cx="0" cy="0"/>
+        </a:xfrm>
+      </p:grpSpPr>
+      <p:sp>
+        <p:nvSpPr>
+          <p:cNvPr id="468" name="Google Shape;468;ge7f9c668d6_0_0:notes">
+            <a:extLst>
+              <a:ext uri="{FF2B5EF4-FFF2-40B4-BE49-F238E27FC236}">
+                <a16:creationId xmlns:a16="http://schemas.microsoft.com/office/drawing/2014/main" id="{4FA61AC4-B601-2017-F5F0-FAB2303286B6}"/>
+              </a:ext>
+            </a:extLst>
+          </p:cNvPr>
+          <p:cNvSpPr>
+            <a:spLocks noGrp="1" noRot="1" noChangeAspect="1"/>
+          </p:cNvSpPr>
+          <p:nvPr>
+            <p:ph type="sldImg" idx="2"/>
+          </p:nvPr>
+        </p:nvSpPr>
+        <p:spPr>
+          <a:xfrm>
+            <a:off x="381000" y="685800"/>
+            <a:ext cx="6096000" cy="3429000"/>
+          </a:xfrm>
+          <a:custGeom>
+            <a:avLst/>
+            <a:gdLst/>
+            <a:ahLst/>
+            <a:cxnLst/>
+            <a:rect l="l" t="t" r="r" b="b"/>
+            <a:pathLst>
+              <a:path w="120000" h="120000" extrusionOk="0">
+                <a:moveTo>
+                  <a:pt x="0" y="0"/>
+                </a:moveTo>
+                <a:lnTo>
+                  <a:pt x="120000" y="0"/>
+                </a:lnTo>
+                <a:lnTo>
+                  <a:pt x="120000" y="120000"/>
+                </a:lnTo>
+                <a:lnTo>
+                  <a:pt x="0" y="120000"/>
+                </a:lnTo>
+                <a:close/>
+              </a:path>
+            </a:pathLst>
+          </a:custGeom>
+        </p:spPr>
+      </p:sp>
+      <p:sp>
+        <p:nvSpPr>
+          <p:cNvPr id="469" name="Google Shape;469;ge7f9c668d6_0_0:notes">
+            <a:extLst>
+              <a:ext uri="{FF2B5EF4-FFF2-40B4-BE49-F238E27FC236}">
+                <a16:creationId xmlns:a16="http://schemas.microsoft.com/office/drawing/2014/main" id="{3AC00BB1-5BB9-A4A2-4196-88D6BBF3FCD0}"/>
+              </a:ext>
+            </a:extLst>
+          </p:cNvPr>
+          <p:cNvSpPr txBox="1">
+            <a:spLocks noGrp="1"/>
+          </p:cNvSpPr>
+          <p:nvPr>
+            <p:ph type="body" idx="1"/>
+          </p:nvPr>
+        </p:nvSpPr>
+        <p:spPr>
+          <a:xfrm>
+            <a:off x="685800" y="4343400"/>
+            <a:ext cx="5486400" cy="4114800"/>
+          </a:xfrm>
+          <a:prstGeom prst="rect">
+            <a:avLst/>
+          </a:prstGeom>
+        </p:spPr>
+        <p:txBody>
+          <a:bodyPr spcFirstLastPara="1" wrap="square" lIns="91425" tIns="91425" rIns="91425" bIns="91425" anchor="t" anchorCtr="0">
+            <a:noAutofit/>
+          </a:bodyPr>
+          <a:lstStyle/>
+          <a:p>
+            <a:pPr marL="0" lvl="0" indent="0" algn="l" rtl="0">
+              <a:spcBef>
+                <a:spcPts val="0"/>
+              </a:spcBef>
+              <a:spcAft>
+                <a:spcPts val="0"/>
+              </a:spcAft>
+              <a:buNone/>
+            </a:pPr>
+            <a:endParaRPr/>
+          </a:p>
+        </p:txBody>
+      </p:sp>
+    </p:spTree>
+    <p:extLst>
+      <p:ext uri="{BB962C8B-B14F-4D97-AF65-F5344CB8AC3E}">
+        <p14:creationId xmlns:p14="http://schemas.microsoft.com/office/powerpoint/2010/main" val="1114897654"/>
+      </p:ext>
+    </p:extLst>
+  </p:cSld>
+  <p:clrMapOvr>
+    <a:masterClrMapping/>
+  </p:clrMapOvr>
+</p:notes>
+</file>
+
+<file path=ppt/notesSlides/notesSlide14.xml><?xml version="1.0" encoding="utf-8"?>
+<p:notes xmlns:a="http://schemas.openxmlformats.org/drawingml/2006/main" xmlns:r="http://schemas.openxmlformats.org/officeDocument/2006/relationships" xmlns:p="http://schemas.openxmlformats.org/presentationml/2006/main" showMasterSp="0" showMasterPhAnim="0">
+  <p:cSld>
+    <p:spTree>
+      <p:nvGrpSpPr>
+        <p:cNvPr id="1" name="Shape 467">
+          <a:extLst>
+            <a:ext uri="{FF2B5EF4-FFF2-40B4-BE49-F238E27FC236}">
+              <a16:creationId xmlns:a16="http://schemas.microsoft.com/office/drawing/2014/main" id="{838828E8-A0C1-7962-FBA3-1A1D7A161EB4}"/>
+            </a:ext>
+          </a:extLst>
+        </p:cNvPr>
+        <p:cNvGrpSpPr/>
+        <p:nvPr/>
+      </p:nvGrpSpPr>
+      <p:grpSpPr>
+        <a:xfrm>
+          <a:off x="0" y="0"/>
+          <a:ext cx="0" cy="0"/>
+          <a:chOff x="0" y="0"/>
+          <a:chExt cx="0" cy="0"/>
+        </a:xfrm>
+      </p:grpSpPr>
+      <p:sp>
+        <p:nvSpPr>
+          <p:cNvPr id="468" name="Google Shape;468;ge7f9c668d6_0_0:notes">
+            <a:extLst>
+              <a:ext uri="{FF2B5EF4-FFF2-40B4-BE49-F238E27FC236}">
+                <a16:creationId xmlns:a16="http://schemas.microsoft.com/office/drawing/2014/main" id="{262409C3-5456-0876-5CFC-49AF39501822}"/>
+              </a:ext>
+            </a:extLst>
+          </p:cNvPr>
+          <p:cNvSpPr>
+            <a:spLocks noGrp="1" noRot="1" noChangeAspect="1"/>
+          </p:cNvSpPr>
+          <p:nvPr>
+            <p:ph type="sldImg" idx="2"/>
+          </p:nvPr>
+        </p:nvSpPr>
+        <p:spPr>
+          <a:xfrm>
+            <a:off x="381000" y="685800"/>
+            <a:ext cx="6096000" cy="3429000"/>
+          </a:xfrm>
+          <a:custGeom>
+            <a:avLst/>
+            <a:gdLst/>
+            <a:ahLst/>
+            <a:cxnLst/>
+            <a:rect l="l" t="t" r="r" b="b"/>
+            <a:pathLst>
+              <a:path w="120000" h="120000" extrusionOk="0">
+                <a:moveTo>
+                  <a:pt x="0" y="0"/>
+                </a:moveTo>
+                <a:lnTo>
+                  <a:pt x="120000" y="0"/>
+                </a:lnTo>
+                <a:lnTo>
+                  <a:pt x="120000" y="120000"/>
+                </a:lnTo>
+                <a:lnTo>
+                  <a:pt x="0" y="120000"/>
+                </a:lnTo>
+                <a:close/>
+              </a:path>
+            </a:pathLst>
+          </a:custGeom>
+        </p:spPr>
+      </p:sp>
+      <p:sp>
+        <p:nvSpPr>
+          <p:cNvPr id="469" name="Google Shape;469;ge7f9c668d6_0_0:notes">
+            <a:extLst>
+              <a:ext uri="{FF2B5EF4-FFF2-40B4-BE49-F238E27FC236}">
+                <a16:creationId xmlns:a16="http://schemas.microsoft.com/office/drawing/2014/main" id="{295B822B-384C-D03D-13E6-F4C87AFAE7F9}"/>
+              </a:ext>
+            </a:extLst>
+          </p:cNvPr>
+          <p:cNvSpPr txBox="1">
+            <a:spLocks noGrp="1"/>
+          </p:cNvSpPr>
+          <p:nvPr>
+            <p:ph type="body" idx="1"/>
+          </p:nvPr>
+        </p:nvSpPr>
+        <p:spPr>
+          <a:xfrm>
+            <a:off x="685800" y="4343400"/>
+            <a:ext cx="5486400" cy="4114800"/>
+          </a:xfrm>
+          <a:prstGeom prst="rect">
+            <a:avLst/>
+          </a:prstGeom>
+        </p:spPr>
+        <p:txBody>
+          <a:bodyPr spcFirstLastPara="1" wrap="square" lIns="91425" tIns="91425" rIns="91425" bIns="91425" anchor="t" anchorCtr="0">
+            <a:noAutofit/>
+          </a:bodyPr>
+          <a:lstStyle/>
+          <a:p>
+            <a:pPr marL="0" lvl="0" indent="0" algn="l" rtl="0">
+              <a:spcBef>
+                <a:spcPts val="0"/>
+              </a:spcBef>
+              <a:spcAft>
+                <a:spcPts val="0"/>
+              </a:spcAft>
+              <a:buNone/>
+            </a:pPr>
+            <a:endParaRPr/>
+          </a:p>
+        </p:txBody>
+      </p:sp>
+    </p:spTree>
+    <p:extLst>
+      <p:ext uri="{BB962C8B-B14F-4D97-AF65-F5344CB8AC3E}">
+        <p14:creationId xmlns:p14="http://schemas.microsoft.com/office/powerpoint/2010/main" val="244022060"/>
       </p:ext>
     </p:extLst>
   </p:cSld>
@@ -10341,7 +10597,7 @@
               </a:spcAft>
             </a:pPr>
             <a:r>
-              <a:rPr lang="en-US" sz="1600" dirty="0">
+              <a:rPr lang="en-US" dirty="0">
                 <a:solidFill>
                   <a:schemeClr val="accent1"/>
                 </a:solidFill>
@@ -10362,7 +10618,7 @@
                 <a:spcPts val="0"/>
               </a:spcAft>
             </a:pPr>
-            <a:endParaRPr lang="en-US" sz="1600" dirty="0">
+            <a:endParaRPr lang="en-US" dirty="0">
               <a:solidFill>
                 <a:schemeClr val="accent1"/>
               </a:solidFill>
@@ -10382,7 +10638,7 @@
               </a:spcAft>
             </a:pPr>
             <a:r>
-              <a:rPr lang="en-US" sz="1600" dirty="0">
+              <a:rPr lang="en-US" dirty="0">
                 <a:solidFill>
                   <a:schemeClr val="accent1"/>
                 </a:solidFill>
@@ -10720,6 +10976,1921 @@
     <p:extLst>
       <p:ext uri="{BB962C8B-B14F-4D97-AF65-F5344CB8AC3E}">
         <p14:creationId xmlns:p14="http://schemas.microsoft.com/office/powerpoint/2010/main" val="1533457278"/>
+      </p:ext>
+    </p:extLst>
+  </p:cSld>
+  <p:clrMapOvr>
+    <a:masterClrMapping/>
+  </p:clrMapOvr>
+</p:sld>
+</file>
+
+<file path=ppt/slides/slide13.xml><?xml version="1.0" encoding="utf-8"?>
+<p:sld xmlns:a="http://schemas.openxmlformats.org/drawingml/2006/main" xmlns:r="http://schemas.openxmlformats.org/officeDocument/2006/relationships" xmlns:p="http://schemas.openxmlformats.org/presentationml/2006/main">
+  <p:cSld>
+    <p:spTree>
+      <p:nvGrpSpPr>
+        <p:cNvPr id="1" name="Shape 470">
+          <a:extLst>
+            <a:ext uri="{FF2B5EF4-FFF2-40B4-BE49-F238E27FC236}">
+              <a16:creationId xmlns:a16="http://schemas.microsoft.com/office/drawing/2014/main" id="{1E7D00E1-8941-4794-B60A-6F7F2984352A}"/>
+            </a:ext>
+          </a:extLst>
+        </p:cNvPr>
+        <p:cNvGrpSpPr/>
+        <p:nvPr/>
+      </p:nvGrpSpPr>
+      <p:grpSpPr>
+        <a:xfrm>
+          <a:off x="0" y="0"/>
+          <a:ext cx="0" cy="0"/>
+          <a:chOff x="0" y="0"/>
+          <a:chExt cx="0" cy="0"/>
+        </a:xfrm>
+      </p:grpSpPr>
+      <p:sp>
+        <p:nvSpPr>
+          <p:cNvPr id="471" name="Google Shape;471;p28">
+            <a:extLst>
+              <a:ext uri="{FF2B5EF4-FFF2-40B4-BE49-F238E27FC236}">
+                <a16:creationId xmlns:a16="http://schemas.microsoft.com/office/drawing/2014/main" id="{AF6AA381-5548-C65B-4C29-0EF09D369331}"/>
+              </a:ext>
+            </a:extLst>
+          </p:cNvPr>
+          <p:cNvSpPr txBox="1">
+            <a:spLocks noGrp="1"/>
+          </p:cNvSpPr>
+          <p:nvPr>
+            <p:ph type="title"/>
+          </p:nvPr>
+        </p:nvSpPr>
+        <p:spPr>
+          <a:xfrm>
+            <a:off x="1219942" y="533260"/>
+            <a:ext cx="2484854" cy="541200"/>
+          </a:xfrm>
+          <a:prstGeom prst="rect">
+            <a:avLst/>
+          </a:prstGeom>
+        </p:spPr>
+        <p:txBody>
+          <a:bodyPr spcFirstLastPara="1" wrap="square" lIns="91425" tIns="91425" rIns="91425" bIns="91425" anchor="t" anchorCtr="0">
+            <a:noAutofit/>
+          </a:bodyPr>
+          <a:lstStyle/>
+          <a:p>
+            <a:pPr marL="0" lvl="0" indent="0" algn="l" rtl="0">
+              <a:spcBef>
+                <a:spcPts val="0"/>
+              </a:spcBef>
+              <a:spcAft>
+                <a:spcPts val="0"/>
+              </a:spcAft>
+              <a:buNone/>
+            </a:pPr>
+            <a:r>
+              <a:rPr lang="en-US" dirty="0">
+                <a:solidFill>
+                  <a:schemeClr val="accent2"/>
+                </a:solidFill>
+              </a:rPr>
+              <a:t>Home Work</a:t>
+            </a:r>
+            <a:endParaRPr dirty="0">
+              <a:solidFill>
+                <a:schemeClr val="accent2"/>
+              </a:solidFill>
+            </a:endParaRPr>
+          </a:p>
+        </p:txBody>
+      </p:sp>
+      <p:sp>
+        <p:nvSpPr>
+          <p:cNvPr id="473" name="Google Shape;473;p28">
+            <a:extLst>
+              <a:ext uri="{FF2B5EF4-FFF2-40B4-BE49-F238E27FC236}">
+                <a16:creationId xmlns:a16="http://schemas.microsoft.com/office/drawing/2014/main" id="{160564C3-6FBC-3C68-35C9-4B277643F922}"/>
+              </a:ext>
+            </a:extLst>
+          </p:cNvPr>
+          <p:cNvSpPr txBox="1">
+            <a:spLocks noGrp="1"/>
+          </p:cNvSpPr>
+          <p:nvPr>
+            <p:ph type="subTitle" idx="4294967295"/>
+          </p:nvPr>
+        </p:nvSpPr>
+        <p:spPr>
+          <a:xfrm>
+            <a:off x="710125" y="4694725"/>
+            <a:ext cx="4865100" cy="357300"/>
+          </a:xfrm>
+          <a:prstGeom prst="rect">
+            <a:avLst/>
+          </a:prstGeom>
+        </p:spPr>
+        <p:txBody>
+          <a:bodyPr spcFirstLastPara="1" wrap="square" lIns="91425" tIns="91425" rIns="91425" bIns="91425" anchor="ctr" anchorCtr="0">
+            <a:noAutofit/>
+          </a:bodyPr>
+          <a:lstStyle/>
+          <a:p>
+            <a:pPr marL="0" lvl="0" indent="0" algn="l" rtl="0">
+              <a:spcBef>
+                <a:spcPts val="0"/>
+              </a:spcBef>
+              <a:spcAft>
+                <a:spcPts val="0"/>
+              </a:spcAft>
+              <a:buNone/>
+            </a:pPr>
+            <a:r>
+              <a:rPr lang="en" sz="1400" dirty="0">
+                <a:solidFill>
+                  <a:schemeClr val="accent3"/>
+                </a:solidFill>
+              </a:rPr>
+              <a:t>Programming Language Lab</a:t>
+            </a:r>
+            <a:endParaRPr sz="1400" dirty="0">
+              <a:solidFill>
+                <a:schemeClr val="accent3"/>
+              </a:solidFill>
+            </a:endParaRPr>
+          </a:p>
+        </p:txBody>
+      </p:sp>
+      <p:sp>
+        <p:nvSpPr>
+          <p:cNvPr id="475" name="Google Shape;475;p28">
+            <a:extLst>
+              <a:ext uri="{FF2B5EF4-FFF2-40B4-BE49-F238E27FC236}">
+                <a16:creationId xmlns:a16="http://schemas.microsoft.com/office/drawing/2014/main" id="{9FC3571A-F5CC-C81D-DAAD-2C6814EFDEBD}"/>
+              </a:ext>
+            </a:extLst>
+          </p:cNvPr>
+          <p:cNvSpPr txBox="1">
+            <a:spLocks noGrp="1"/>
+          </p:cNvSpPr>
+          <p:nvPr>
+            <p:ph type="subTitle" idx="4294967295"/>
+          </p:nvPr>
+        </p:nvSpPr>
+        <p:spPr>
+          <a:xfrm>
+            <a:off x="4572000" y="91525"/>
+            <a:ext cx="4572000" cy="357300"/>
+          </a:xfrm>
+          <a:prstGeom prst="rect">
+            <a:avLst/>
+          </a:prstGeom>
+        </p:spPr>
+        <p:txBody>
+          <a:bodyPr spcFirstLastPara="1" wrap="square" lIns="91425" tIns="91425" rIns="91425" bIns="91425" anchor="ctr" anchorCtr="0">
+            <a:noAutofit/>
+          </a:bodyPr>
+          <a:lstStyle/>
+          <a:p>
+            <a:pPr marL="0" lvl="0" indent="0" algn="ctr" rtl="0">
+              <a:spcBef>
+                <a:spcPts val="0"/>
+              </a:spcBef>
+              <a:spcAft>
+                <a:spcPts val="0"/>
+              </a:spcAft>
+              <a:buNone/>
+            </a:pPr>
+            <a:r>
+              <a:rPr lang="en-US" sz="1400" dirty="0">
+                <a:solidFill>
+                  <a:schemeClr val="accent3"/>
+                </a:solidFill>
+              </a:rPr>
+              <a:t>HW1</a:t>
+            </a:r>
+            <a:endParaRPr sz="1400" dirty="0">
+              <a:solidFill>
+                <a:schemeClr val="accent3"/>
+              </a:solidFill>
+            </a:endParaRPr>
+          </a:p>
+        </p:txBody>
+      </p:sp>
+      <p:sp>
+        <p:nvSpPr>
+          <p:cNvPr id="2" name="Google Shape;583;p33">
+            <a:extLst>
+              <a:ext uri="{FF2B5EF4-FFF2-40B4-BE49-F238E27FC236}">
+                <a16:creationId xmlns:a16="http://schemas.microsoft.com/office/drawing/2014/main" id="{19E9ED4D-AA7A-1174-A72C-D8A48E5FBA5E}"/>
+              </a:ext>
+            </a:extLst>
+          </p:cNvPr>
+          <p:cNvSpPr txBox="1"/>
+          <p:nvPr/>
+        </p:nvSpPr>
+        <p:spPr>
+          <a:xfrm>
+            <a:off x="1219942" y="1417025"/>
+            <a:ext cx="7482957" cy="2592570"/>
+          </a:xfrm>
+          <a:prstGeom prst="rect">
+            <a:avLst/>
+          </a:prstGeom>
+          <a:noFill/>
+          <a:ln>
+            <a:noFill/>
+          </a:ln>
+        </p:spPr>
+        <p:txBody>
+          <a:bodyPr spcFirstLastPara="1" wrap="square" lIns="91425" tIns="91425" rIns="91425" bIns="91425" anchor="ctr" anchorCtr="0">
+            <a:noAutofit/>
+          </a:bodyPr>
+          <a:lstStyle/>
+          <a:p>
+            <a:pPr lvl="0" algn="just" eaLnBrk="0" fontAlgn="base" hangingPunct="0">
+              <a:spcBef>
+                <a:spcPct val="0"/>
+              </a:spcBef>
+              <a:spcAft>
+                <a:spcPct val="0"/>
+              </a:spcAft>
+              <a:buClrTx/>
+            </a:pPr>
+            <a:r>
+              <a:rPr lang="en-US" altLang="en-US" sz="1200" dirty="0">
+                <a:solidFill>
+                  <a:schemeClr val="accent1"/>
+                </a:solidFill>
+                <a:latin typeface="Fira Code"/>
+                <a:ea typeface="Fira Code"/>
+                <a:cs typeface="Fira Code"/>
+              </a:rPr>
+              <a:t>Grading System with Conditions</a:t>
+            </a:r>
+          </a:p>
+          <a:p>
+            <a:pPr lvl="0" algn="just" eaLnBrk="0" fontAlgn="base" hangingPunct="0">
+              <a:spcBef>
+                <a:spcPct val="0"/>
+              </a:spcBef>
+              <a:spcAft>
+                <a:spcPct val="0"/>
+              </a:spcAft>
+              <a:buClrTx/>
+            </a:pPr>
+            <a:endParaRPr lang="en-US" altLang="en-US" sz="1200" dirty="0">
+              <a:solidFill>
+                <a:schemeClr val="accent1"/>
+              </a:solidFill>
+              <a:latin typeface="Fira Code"/>
+              <a:ea typeface="Fira Code"/>
+              <a:cs typeface="Fira Code"/>
+            </a:endParaRPr>
+          </a:p>
+          <a:p>
+            <a:pPr lvl="0" algn="just" eaLnBrk="0" fontAlgn="base" hangingPunct="0">
+              <a:spcBef>
+                <a:spcPct val="0"/>
+              </a:spcBef>
+              <a:spcAft>
+                <a:spcPct val="0"/>
+              </a:spcAft>
+              <a:buClrTx/>
+            </a:pPr>
+            <a:r>
+              <a:rPr lang="en-US" altLang="en-US" sz="1200" dirty="0">
+                <a:solidFill>
+                  <a:schemeClr val="accent1"/>
+                </a:solidFill>
+                <a:latin typeface="Fira Code"/>
+                <a:ea typeface="Fira Code"/>
+                <a:cs typeface="Fira Code"/>
+              </a:rPr>
+              <a:t>Problem Statement:</a:t>
+            </a:r>
+          </a:p>
+          <a:p>
+            <a:pPr lvl="0" algn="just" eaLnBrk="0" fontAlgn="base" hangingPunct="0">
+              <a:spcBef>
+                <a:spcPct val="0"/>
+              </a:spcBef>
+              <a:spcAft>
+                <a:spcPct val="0"/>
+              </a:spcAft>
+              <a:buClrTx/>
+            </a:pPr>
+            <a:endParaRPr lang="en-US" altLang="en-US" sz="1200" dirty="0">
+              <a:solidFill>
+                <a:schemeClr val="accent1"/>
+              </a:solidFill>
+              <a:latin typeface="Fira Code"/>
+              <a:ea typeface="Fira Code"/>
+              <a:cs typeface="Fira Code"/>
+            </a:endParaRPr>
+          </a:p>
+          <a:p>
+            <a:pPr lvl="0" algn="just" eaLnBrk="0" fontAlgn="base" hangingPunct="0">
+              <a:spcBef>
+                <a:spcPct val="0"/>
+              </a:spcBef>
+              <a:spcAft>
+                <a:spcPct val="0"/>
+              </a:spcAft>
+              <a:buClrTx/>
+            </a:pPr>
+            <a:r>
+              <a:rPr lang="en-US" altLang="en-US" sz="1200" dirty="0">
+                <a:solidFill>
+                  <a:schemeClr val="accent1"/>
+                </a:solidFill>
+                <a:latin typeface="Fira Code"/>
+                <a:ea typeface="Fira Code"/>
+                <a:cs typeface="Fira Code"/>
+              </a:rPr>
+              <a:t>Write a C program that takes two inputs from the user:</a:t>
+            </a:r>
+          </a:p>
+          <a:p>
+            <a:pPr lvl="0" algn="just" eaLnBrk="0" fontAlgn="base" hangingPunct="0">
+              <a:spcBef>
+                <a:spcPct val="0"/>
+              </a:spcBef>
+              <a:spcAft>
+                <a:spcPct val="0"/>
+              </a:spcAft>
+              <a:buClrTx/>
+              <a:buFontTx/>
+              <a:buChar char="•"/>
+            </a:pPr>
+            <a:r>
+              <a:rPr lang="en-US" altLang="en-US" sz="1200" dirty="0">
+                <a:solidFill>
+                  <a:schemeClr val="accent1"/>
+                </a:solidFill>
+                <a:latin typeface="Fira Code"/>
+                <a:ea typeface="Fira Code"/>
+                <a:cs typeface="Fira Code"/>
+              </a:rPr>
+              <a:t>The score of a student (integer between 0 and 100)</a:t>
+            </a:r>
+          </a:p>
+          <a:p>
+            <a:pPr lvl="0" algn="just" eaLnBrk="0" fontAlgn="base" hangingPunct="0">
+              <a:spcBef>
+                <a:spcPct val="0"/>
+              </a:spcBef>
+              <a:spcAft>
+                <a:spcPct val="0"/>
+              </a:spcAft>
+              <a:buClrTx/>
+              <a:buFontTx/>
+              <a:buChar char="•"/>
+            </a:pPr>
+            <a:r>
+              <a:rPr lang="en-US" altLang="en-US" sz="1200" dirty="0">
+                <a:solidFill>
+                  <a:schemeClr val="accent1"/>
+                </a:solidFill>
+                <a:latin typeface="Fira Code"/>
+                <a:ea typeface="Fira Code"/>
+                <a:cs typeface="Fira Code"/>
+              </a:rPr>
+              <a:t>The type of exam:</a:t>
+            </a:r>
+          </a:p>
+          <a:p>
+            <a:pPr lvl="0" algn="just" eaLnBrk="0" fontAlgn="base" hangingPunct="0">
+              <a:spcBef>
+                <a:spcPct val="0"/>
+              </a:spcBef>
+              <a:spcAft>
+                <a:spcPct val="0"/>
+              </a:spcAft>
+              <a:buClrTx/>
+              <a:buFontTx/>
+              <a:buChar char="•"/>
+            </a:pPr>
+            <a:endParaRPr lang="en-US" altLang="en-US" sz="1200" dirty="0">
+              <a:solidFill>
+                <a:schemeClr val="accent1"/>
+              </a:solidFill>
+              <a:latin typeface="Fira Code"/>
+              <a:ea typeface="Fira Code"/>
+              <a:cs typeface="Fira Code"/>
+            </a:endParaRPr>
+          </a:p>
+          <a:p>
+            <a:pPr marL="457200" lvl="1" eaLnBrk="0" fontAlgn="base" hangingPunct="0">
+              <a:spcBef>
+                <a:spcPct val="0"/>
+              </a:spcBef>
+              <a:spcAft>
+                <a:spcPct val="0"/>
+              </a:spcAft>
+              <a:buClrTx/>
+              <a:buFontTx/>
+              <a:buChar char="•"/>
+            </a:pPr>
+            <a:r>
+              <a:rPr lang="en-US" altLang="en-US" sz="1200" dirty="0">
+                <a:solidFill>
+                  <a:schemeClr val="accent1"/>
+                </a:solidFill>
+                <a:latin typeface="Fira Code"/>
+                <a:ea typeface="Fira Code"/>
+                <a:cs typeface="Fira Code"/>
+              </a:rPr>
+              <a:t>'M' for midterm</a:t>
+            </a:r>
+          </a:p>
+          <a:p>
+            <a:pPr marL="457200" lvl="1" eaLnBrk="0" fontAlgn="base" hangingPunct="0">
+              <a:spcBef>
+                <a:spcPct val="0"/>
+              </a:spcBef>
+              <a:spcAft>
+                <a:spcPct val="0"/>
+              </a:spcAft>
+              <a:buClrTx/>
+              <a:buFontTx/>
+              <a:buChar char="•"/>
+            </a:pPr>
+            <a:r>
+              <a:rPr lang="en-US" altLang="en-US" sz="1200" dirty="0">
+                <a:solidFill>
+                  <a:schemeClr val="accent1"/>
+                </a:solidFill>
+                <a:latin typeface="Fira Code"/>
+                <a:ea typeface="Fira Code"/>
+                <a:cs typeface="Fira Code"/>
+              </a:rPr>
+              <a:t>'F' for final</a:t>
+            </a:r>
+          </a:p>
+          <a:p>
+            <a:pPr marL="457200" lvl="1" eaLnBrk="0" fontAlgn="base" hangingPunct="0">
+              <a:spcBef>
+                <a:spcPct val="0"/>
+              </a:spcBef>
+              <a:spcAft>
+                <a:spcPct val="0"/>
+              </a:spcAft>
+              <a:buClrTx/>
+              <a:buFontTx/>
+              <a:buChar char="•"/>
+            </a:pPr>
+            <a:r>
+              <a:rPr lang="en-US" altLang="en-US" sz="1200" dirty="0">
+                <a:solidFill>
+                  <a:schemeClr val="accent1"/>
+                </a:solidFill>
+                <a:latin typeface="Fira Code"/>
+                <a:ea typeface="Fira Code"/>
+                <a:cs typeface="Fira Code"/>
+              </a:rPr>
+              <a:t>'Q' for quiz</a:t>
+            </a:r>
+          </a:p>
+          <a:p>
+            <a:pPr lvl="0" algn="just" eaLnBrk="0" fontAlgn="base" hangingPunct="0">
+              <a:spcBef>
+                <a:spcPct val="0"/>
+              </a:spcBef>
+              <a:spcAft>
+                <a:spcPct val="0"/>
+              </a:spcAft>
+              <a:buClrTx/>
+              <a:buFontTx/>
+              <a:buChar char="•"/>
+            </a:pPr>
+            <a:endParaRPr lang="en-US" altLang="en-US" sz="1200" dirty="0">
+              <a:solidFill>
+                <a:schemeClr val="accent1"/>
+              </a:solidFill>
+              <a:latin typeface="Fira Code"/>
+              <a:ea typeface="Fira Code"/>
+              <a:cs typeface="Fira Code"/>
+            </a:endParaRPr>
+          </a:p>
+          <a:p>
+            <a:pPr lvl="0" eaLnBrk="0" fontAlgn="base" hangingPunct="0">
+              <a:spcBef>
+                <a:spcPct val="0"/>
+              </a:spcBef>
+              <a:spcAft>
+                <a:spcPct val="0"/>
+              </a:spcAft>
+              <a:buClrTx/>
+            </a:pPr>
+            <a:r>
+              <a:rPr lang="en-US" altLang="en-US" sz="1200" dirty="0">
+                <a:solidFill>
+                  <a:schemeClr val="accent1"/>
+                </a:solidFill>
+                <a:latin typeface="Fira Code"/>
+                <a:ea typeface="Fira Code"/>
+                <a:cs typeface="Fira Code"/>
+              </a:rPr>
+              <a:t>Then, based on the exam type and score, print the final result:</a:t>
+            </a:r>
+          </a:p>
+          <a:p>
+            <a:pPr lvl="0" algn="just" eaLnBrk="0" fontAlgn="base" hangingPunct="0">
+              <a:spcBef>
+                <a:spcPct val="0"/>
+              </a:spcBef>
+              <a:spcAft>
+                <a:spcPct val="0"/>
+              </a:spcAft>
+              <a:buClrTx/>
+              <a:buFontTx/>
+              <a:buChar char="•"/>
+            </a:pPr>
+            <a:endParaRPr lang="en-US" altLang="en-US" sz="1200" dirty="0">
+              <a:solidFill>
+                <a:schemeClr val="accent1"/>
+              </a:solidFill>
+              <a:latin typeface="Fira Code"/>
+              <a:ea typeface="Fira Code"/>
+              <a:cs typeface="Fira Code"/>
+            </a:endParaRPr>
+          </a:p>
+          <a:p>
+            <a:pPr lvl="0" algn="just" eaLnBrk="0" fontAlgn="base" hangingPunct="0">
+              <a:spcBef>
+                <a:spcPct val="0"/>
+              </a:spcBef>
+              <a:spcAft>
+                <a:spcPct val="0"/>
+              </a:spcAft>
+              <a:buClrTx/>
+              <a:buFontTx/>
+              <a:buChar char="•"/>
+            </a:pPr>
+            <a:endParaRPr lang="en-US" altLang="en-US" sz="1200" dirty="0">
+              <a:solidFill>
+                <a:schemeClr val="accent1"/>
+              </a:solidFill>
+              <a:latin typeface="Fira Code"/>
+              <a:ea typeface="Fira Code"/>
+              <a:cs typeface="Fira Code"/>
+            </a:endParaRPr>
+          </a:p>
+        </p:txBody>
+      </p:sp>
+      <p:sp>
+        <p:nvSpPr>
+          <p:cNvPr id="3" name="Google Shape;473;p28">
+            <a:extLst>
+              <a:ext uri="{FF2B5EF4-FFF2-40B4-BE49-F238E27FC236}">
+                <a16:creationId xmlns:a16="http://schemas.microsoft.com/office/drawing/2014/main" id="{8CB48AC1-4D0B-0515-9A9C-DD7E10826FEB}"/>
+              </a:ext>
+            </a:extLst>
+          </p:cNvPr>
+          <p:cNvSpPr txBox="1">
+            <a:spLocks/>
+          </p:cNvSpPr>
+          <p:nvPr/>
+        </p:nvSpPr>
+        <p:spPr>
+          <a:xfrm>
+            <a:off x="8433850" y="4694675"/>
+            <a:ext cx="421081" cy="357300"/>
+          </a:xfrm>
+          <a:prstGeom prst="rect">
+            <a:avLst/>
+          </a:prstGeom>
+          <a:noFill/>
+          <a:ln>
+            <a:noFill/>
+          </a:ln>
+        </p:spPr>
+        <p:txBody>
+          <a:bodyPr spcFirstLastPara="1" wrap="square" lIns="91425" tIns="91425" rIns="91425" bIns="91425" anchor="ctr" anchorCtr="0">
+            <a:noAutofit/>
+          </a:bodyPr>
+          <a:lstStyle>
+            <a:defPPr marR="0" lvl="0" algn="l" rtl="0">
+              <a:lnSpc>
+                <a:spcPct val="100000"/>
+              </a:lnSpc>
+              <a:spcBef>
+                <a:spcPts val="0"/>
+              </a:spcBef>
+              <a:spcAft>
+                <a:spcPts val="0"/>
+              </a:spcAft>
+            </a:defPPr>
+            <a:lvl1pPr marL="457200" marR="0" lvl="0" indent="-317500" algn="l" rtl="0">
+              <a:lnSpc>
+                <a:spcPct val="100000"/>
+              </a:lnSpc>
+              <a:spcBef>
+                <a:spcPts val="0"/>
+              </a:spcBef>
+              <a:spcAft>
+                <a:spcPts val="0"/>
+              </a:spcAft>
+              <a:buClr>
+                <a:schemeClr val="dk2"/>
+              </a:buClr>
+              <a:buSzPts val="1400"/>
+              <a:buFont typeface="Fira Code"/>
+              <a:buChar char="●"/>
+              <a:defRPr sz="1400" b="0" i="0" u="none" strike="noStrike" cap="none">
+                <a:solidFill>
+                  <a:schemeClr val="dk2"/>
+                </a:solidFill>
+                <a:latin typeface="Fira Code"/>
+                <a:ea typeface="Fira Code"/>
+                <a:cs typeface="Fira Code"/>
+                <a:sym typeface="Fira Code"/>
+              </a:defRPr>
+            </a:lvl1pPr>
+            <a:lvl2pPr marL="914400" marR="0" lvl="1" indent="-317500" algn="l" rtl="0">
+              <a:lnSpc>
+                <a:spcPct val="100000"/>
+              </a:lnSpc>
+              <a:spcBef>
+                <a:spcPts val="0"/>
+              </a:spcBef>
+              <a:spcAft>
+                <a:spcPts val="0"/>
+              </a:spcAft>
+              <a:buClr>
+                <a:schemeClr val="dk2"/>
+              </a:buClr>
+              <a:buSzPts val="1400"/>
+              <a:buFont typeface="Fira Code"/>
+              <a:buChar char="○"/>
+              <a:defRPr sz="1400" b="0" i="0" u="none" strike="noStrike" cap="none">
+                <a:solidFill>
+                  <a:schemeClr val="dk2"/>
+                </a:solidFill>
+                <a:latin typeface="Fira Code"/>
+                <a:ea typeface="Fira Code"/>
+                <a:cs typeface="Fira Code"/>
+                <a:sym typeface="Fira Code"/>
+              </a:defRPr>
+            </a:lvl2pPr>
+            <a:lvl3pPr marL="1371600" marR="0" lvl="2" indent="-317500" algn="l" rtl="0">
+              <a:lnSpc>
+                <a:spcPct val="100000"/>
+              </a:lnSpc>
+              <a:spcBef>
+                <a:spcPts val="0"/>
+              </a:spcBef>
+              <a:spcAft>
+                <a:spcPts val="0"/>
+              </a:spcAft>
+              <a:buClr>
+                <a:schemeClr val="dk2"/>
+              </a:buClr>
+              <a:buSzPts val="1400"/>
+              <a:buFont typeface="Fira Code"/>
+              <a:buChar char="■"/>
+              <a:defRPr sz="1400" b="0" i="0" u="none" strike="noStrike" cap="none">
+                <a:solidFill>
+                  <a:schemeClr val="dk2"/>
+                </a:solidFill>
+                <a:latin typeface="Fira Code"/>
+                <a:ea typeface="Fira Code"/>
+                <a:cs typeface="Fira Code"/>
+                <a:sym typeface="Fira Code"/>
+              </a:defRPr>
+            </a:lvl3pPr>
+            <a:lvl4pPr marL="1828800" marR="0" lvl="3" indent="-317500" algn="l" rtl="0">
+              <a:lnSpc>
+                <a:spcPct val="100000"/>
+              </a:lnSpc>
+              <a:spcBef>
+                <a:spcPts val="0"/>
+              </a:spcBef>
+              <a:spcAft>
+                <a:spcPts val="0"/>
+              </a:spcAft>
+              <a:buClr>
+                <a:schemeClr val="dk2"/>
+              </a:buClr>
+              <a:buSzPts val="1400"/>
+              <a:buFont typeface="Fira Code"/>
+              <a:buChar char="●"/>
+              <a:defRPr sz="1400" b="0" i="0" u="none" strike="noStrike" cap="none">
+                <a:solidFill>
+                  <a:schemeClr val="dk2"/>
+                </a:solidFill>
+                <a:latin typeface="Fira Code"/>
+                <a:ea typeface="Fira Code"/>
+                <a:cs typeface="Fira Code"/>
+                <a:sym typeface="Fira Code"/>
+              </a:defRPr>
+            </a:lvl4pPr>
+            <a:lvl5pPr marL="2286000" marR="0" lvl="4" indent="-317500" algn="l" rtl="0">
+              <a:lnSpc>
+                <a:spcPct val="100000"/>
+              </a:lnSpc>
+              <a:spcBef>
+                <a:spcPts val="0"/>
+              </a:spcBef>
+              <a:spcAft>
+                <a:spcPts val="0"/>
+              </a:spcAft>
+              <a:buClr>
+                <a:schemeClr val="dk2"/>
+              </a:buClr>
+              <a:buSzPts val="1400"/>
+              <a:buFont typeface="Fira Code"/>
+              <a:buChar char="○"/>
+              <a:defRPr sz="1400" b="0" i="0" u="none" strike="noStrike" cap="none">
+                <a:solidFill>
+                  <a:schemeClr val="dk2"/>
+                </a:solidFill>
+                <a:latin typeface="Fira Code"/>
+                <a:ea typeface="Fira Code"/>
+                <a:cs typeface="Fira Code"/>
+                <a:sym typeface="Fira Code"/>
+              </a:defRPr>
+            </a:lvl5pPr>
+            <a:lvl6pPr marL="2743200" marR="0" lvl="5" indent="-317500" algn="l" rtl="0">
+              <a:lnSpc>
+                <a:spcPct val="100000"/>
+              </a:lnSpc>
+              <a:spcBef>
+                <a:spcPts val="0"/>
+              </a:spcBef>
+              <a:spcAft>
+                <a:spcPts val="0"/>
+              </a:spcAft>
+              <a:buClr>
+                <a:schemeClr val="dk2"/>
+              </a:buClr>
+              <a:buSzPts val="1400"/>
+              <a:buFont typeface="Fira Code"/>
+              <a:buChar char="■"/>
+              <a:defRPr sz="1400" b="0" i="0" u="none" strike="noStrike" cap="none">
+                <a:solidFill>
+                  <a:schemeClr val="dk2"/>
+                </a:solidFill>
+                <a:latin typeface="Fira Code"/>
+                <a:ea typeface="Fira Code"/>
+                <a:cs typeface="Fira Code"/>
+                <a:sym typeface="Fira Code"/>
+              </a:defRPr>
+            </a:lvl6pPr>
+            <a:lvl7pPr marL="3200400" marR="0" lvl="6" indent="-317500" algn="l" rtl="0">
+              <a:lnSpc>
+                <a:spcPct val="100000"/>
+              </a:lnSpc>
+              <a:spcBef>
+                <a:spcPts val="0"/>
+              </a:spcBef>
+              <a:spcAft>
+                <a:spcPts val="0"/>
+              </a:spcAft>
+              <a:buClr>
+                <a:schemeClr val="dk2"/>
+              </a:buClr>
+              <a:buSzPts val="1400"/>
+              <a:buFont typeface="Fira Code"/>
+              <a:buChar char="●"/>
+              <a:defRPr sz="1400" b="0" i="0" u="none" strike="noStrike" cap="none">
+                <a:solidFill>
+                  <a:schemeClr val="dk2"/>
+                </a:solidFill>
+                <a:latin typeface="Fira Code"/>
+                <a:ea typeface="Fira Code"/>
+                <a:cs typeface="Fira Code"/>
+                <a:sym typeface="Fira Code"/>
+              </a:defRPr>
+            </a:lvl7pPr>
+            <a:lvl8pPr marL="3657600" marR="0" lvl="7" indent="-317500" algn="l" rtl="0">
+              <a:lnSpc>
+                <a:spcPct val="100000"/>
+              </a:lnSpc>
+              <a:spcBef>
+                <a:spcPts val="0"/>
+              </a:spcBef>
+              <a:spcAft>
+                <a:spcPts val="0"/>
+              </a:spcAft>
+              <a:buClr>
+                <a:schemeClr val="dk2"/>
+              </a:buClr>
+              <a:buSzPts val="1400"/>
+              <a:buFont typeface="Fira Code"/>
+              <a:buChar char="○"/>
+              <a:defRPr sz="1400" b="0" i="0" u="none" strike="noStrike" cap="none">
+                <a:solidFill>
+                  <a:schemeClr val="dk2"/>
+                </a:solidFill>
+                <a:latin typeface="Fira Code"/>
+                <a:ea typeface="Fira Code"/>
+                <a:cs typeface="Fira Code"/>
+                <a:sym typeface="Fira Code"/>
+              </a:defRPr>
+            </a:lvl8pPr>
+            <a:lvl9pPr marL="4114800" marR="0" lvl="8" indent="-317500" algn="l" rtl="0">
+              <a:lnSpc>
+                <a:spcPct val="100000"/>
+              </a:lnSpc>
+              <a:spcBef>
+                <a:spcPts val="0"/>
+              </a:spcBef>
+              <a:spcAft>
+                <a:spcPts val="0"/>
+              </a:spcAft>
+              <a:buClr>
+                <a:schemeClr val="dk2"/>
+              </a:buClr>
+              <a:buSzPts val="1400"/>
+              <a:buFont typeface="Fira Code"/>
+              <a:buChar char="■"/>
+              <a:defRPr sz="1400" b="0" i="0" u="none" strike="noStrike" cap="none">
+                <a:solidFill>
+                  <a:schemeClr val="dk2"/>
+                </a:solidFill>
+                <a:latin typeface="Fira Code"/>
+                <a:ea typeface="Fira Code"/>
+                <a:cs typeface="Fira Code"/>
+                <a:sym typeface="Fira Code"/>
+              </a:defRPr>
+            </a:lvl9pPr>
+          </a:lstStyle>
+          <a:p>
+            <a:pPr marL="0" indent="0">
+              <a:buFont typeface="Fira Code"/>
+              <a:buNone/>
+            </a:pPr>
+            <a:r>
+              <a:rPr lang="en" sz="1100" dirty="0">
+                <a:solidFill>
+                  <a:schemeClr val="accent3"/>
+                </a:solidFill>
+              </a:rPr>
+              <a:t>10</a:t>
+            </a:r>
+            <a:endParaRPr lang="en" dirty="0">
+              <a:solidFill>
+                <a:schemeClr val="accent3"/>
+              </a:solidFill>
+            </a:endParaRPr>
+          </a:p>
+        </p:txBody>
+      </p:sp>
+    </p:spTree>
+    <p:extLst>
+      <p:ext uri="{BB962C8B-B14F-4D97-AF65-F5344CB8AC3E}">
+        <p14:creationId xmlns:p14="http://schemas.microsoft.com/office/powerpoint/2010/main" val="1298007211"/>
+      </p:ext>
+    </p:extLst>
+  </p:cSld>
+  <p:clrMapOvr>
+    <a:masterClrMapping/>
+  </p:clrMapOvr>
+</p:sld>
+</file>
+
+<file path=ppt/slides/slide14.xml><?xml version="1.0" encoding="utf-8"?>
+<p:sld xmlns:a="http://schemas.openxmlformats.org/drawingml/2006/main" xmlns:r="http://schemas.openxmlformats.org/officeDocument/2006/relationships" xmlns:p="http://schemas.openxmlformats.org/presentationml/2006/main">
+  <p:cSld>
+    <p:spTree>
+      <p:nvGrpSpPr>
+        <p:cNvPr id="1" name="Shape 470">
+          <a:extLst>
+            <a:ext uri="{FF2B5EF4-FFF2-40B4-BE49-F238E27FC236}">
+              <a16:creationId xmlns:a16="http://schemas.microsoft.com/office/drawing/2014/main" id="{E75714AD-9341-3B00-C7EA-9A8B297490FC}"/>
+            </a:ext>
+          </a:extLst>
+        </p:cNvPr>
+        <p:cNvGrpSpPr/>
+        <p:nvPr/>
+      </p:nvGrpSpPr>
+      <p:grpSpPr>
+        <a:xfrm>
+          <a:off x="0" y="0"/>
+          <a:ext cx="0" cy="0"/>
+          <a:chOff x="0" y="0"/>
+          <a:chExt cx="0" cy="0"/>
+        </a:xfrm>
+      </p:grpSpPr>
+      <p:sp>
+        <p:nvSpPr>
+          <p:cNvPr id="473" name="Google Shape;473;p28">
+            <a:extLst>
+              <a:ext uri="{FF2B5EF4-FFF2-40B4-BE49-F238E27FC236}">
+                <a16:creationId xmlns:a16="http://schemas.microsoft.com/office/drawing/2014/main" id="{13D6339B-0AE5-4185-7E22-6888EEDCE956}"/>
+              </a:ext>
+            </a:extLst>
+          </p:cNvPr>
+          <p:cNvSpPr txBox="1">
+            <a:spLocks noGrp="1"/>
+          </p:cNvSpPr>
+          <p:nvPr>
+            <p:ph type="subTitle" idx="4294967295"/>
+          </p:nvPr>
+        </p:nvSpPr>
+        <p:spPr>
+          <a:xfrm>
+            <a:off x="710125" y="4694725"/>
+            <a:ext cx="4865100" cy="357300"/>
+          </a:xfrm>
+          <a:prstGeom prst="rect">
+            <a:avLst/>
+          </a:prstGeom>
+        </p:spPr>
+        <p:txBody>
+          <a:bodyPr spcFirstLastPara="1" wrap="square" lIns="91425" tIns="91425" rIns="91425" bIns="91425" anchor="ctr" anchorCtr="0">
+            <a:noAutofit/>
+          </a:bodyPr>
+          <a:lstStyle/>
+          <a:p>
+            <a:pPr marL="0" lvl="0" indent="0" algn="l" rtl="0">
+              <a:spcBef>
+                <a:spcPts val="0"/>
+              </a:spcBef>
+              <a:spcAft>
+                <a:spcPts val="0"/>
+              </a:spcAft>
+              <a:buNone/>
+            </a:pPr>
+            <a:r>
+              <a:rPr lang="en" sz="1400" dirty="0">
+                <a:solidFill>
+                  <a:schemeClr val="accent3"/>
+                </a:solidFill>
+              </a:rPr>
+              <a:t>Programming Language Lab</a:t>
+            </a:r>
+            <a:endParaRPr sz="1400" dirty="0">
+              <a:solidFill>
+                <a:schemeClr val="accent3"/>
+              </a:solidFill>
+            </a:endParaRPr>
+          </a:p>
+        </p:txBody>
+      </p:sp>
+      <p:sp>
+        <p:nvSpPr>
+          <p:cNvPr id="475" name="Google Shape;475;p28">
+            <a:extLst>
+              <a:ext uri="{FF2B5EF4-FFF2-40B4-BE49-F238E27FC236}">
+                <a16:creationId xmlns:a16="http://schemas.microsoft.com/office/drawing/2014/main" id="{DAA3AE1D-7446-B5CC-C506-EA2F576C84FD}"/>
+              </a:ext>
+            </a:extLst>
+          </p:cNvPr>
+          <p:cNvSpPr txBox="1">
+            <a:spLocks noGrp="1"/>
+          </p:cNvSpPr>
+          <p:nvPr>
+            <p:ph type="subTitle" idx="4294967295"/>
+          </p:nvPr>
+        </p:nvSpPr>
+        <p:spPr>
+          <a:xfrm>
+            <a:off x="4572000" y="91525"/>
+            <a:ext cx="4572000" cy="357300"/>
+          </a:xfrm>
+          <a:prstGeom prst="rect">
+            <a:avLst/>
+          </a:prstGeom>
+        </p:spPr>
+        <p:txBody>
+          <a:bodyPr spcFirstLastPara="1" wrap="square" lIns="91425" tIns="91425" rIns="91425" bIns="91425" anchor="ctr" anchorCtr="0">
+            <a:noAutofit/>
+          </a:bodyPr>
+          <a:lstStyle/>
+          <a:p>
+            <a:pPr marL="0" lvl="0" indent="0" algn="ctr" rtl="0">
+              <a:spcBef>
+                <a:spcPts val="0"/>
+              </a:spcBef>
+              <a:spcAft>
+                <a:spcPts val="0"/>
+              </a:spcAft>
+              <a:buNone/>
+            </a:pPr>
+            <a:r>
+              <a:rPr lang="en-US" sz="1400" dirty="0">
+                <a:solidFill>
+                  <a:schemeClr val="accent3"/>
+                </a:solidFill>
+              </a:rPr>
+              <a:t>HW1</a:t>
+            </a:r>
+            <a:endParaRPr sz="1400" dirty="0">
+              <a:solidFill>
+                <a:schemeClr val="accent3"/>
+              </a:solidFill>
+            </a:endParaRPr>
+          </a:p>
+        </p:txBody>
+      </p:sp>
+      <p:sp>
+        <p:nvSpPr>
+          <p:cNvPr id="2" name="Google Shape;583;p33">
+            <a:extLst>
+              <a:ext uri="{FF2B5EF4-FFF2-40B4-BE49-F238E27FC236}">
+                <a16:creationId xmlns:a16="http://schemas.microsoft.com/office/drawing/2014/main" id="{BF4555E6-657E-EA44-ADBC-0C42CF5A10AF}"/>
+              </a:ext>
+            </a:extLst>
+          </p:cNvPr>
+          <p:cNvSpPr txBox="1"/>
+          <p:nvPr/>
+        </p:nvSpPr>
+        <p:spPr>
+          <a:xfrm>
+            <a:off x="1161433" y="885717"/>
+            <a:ext cx="7482957" cy="3372016"/>
+          </a:xfrm>
+          <a:prstGeom prst="rect">
+            <a:avLst/>
+          </a:prstGeom>
+          <a:noFill/>
+          <a:ln>
+            <a:noFill/>
+          </a:ln>
+        </p:spPr>
+        <p:txBody>
+          <a:bodyPr spcFirstLastPara="1" wrap="square" lIns="91425" tIns="91425" rIns="91425" bIns="91425" anchor="ctr" anchorCtr="0">
+            <a:noAutofit/>
+          </a:bodyPr>
+          <a:lstStyle/>
+          <a:p>
+            <a:pPr eaLnBrk="0" fontAlgn="base" hangingPunct="0">
+              <a:spcBef>
+                <a:spcPct val="0"/>
+              </a:spcBef>
+              <a:spcAft>
+                <a:spcPct val="0"/>
+              </a:spcAft>
+              <a:buClrTx/>
+              <a:buFontTx/>
+              <a:buChar char="•"/>
+            </a:pPr>
+            <a:r>
+              <a:rPr lang="en-US" altLang="en-US" sz="1200" dirty="0">
+                <a:solidFill>
+                  <a:schemeClr val="accent1"/>
+                </a:solidFill>
+                <a:latin typeface="Fira Code"/>
+                <a:ea typeface="Fira Code"/>
+                <a:cs typeface="Fira Code"/>
+              </a:rPr>
+              <a:t>For midterm:</a:t>
+            </a:r>
+          </a:p>
+          <a:p>
+            <a:pPr marL="457200" lvl="1" eaLnBrk="0" fontAlgn="base" hangingPunct="0">
+              <a:spcBef>
+                <a:spcPct val="0"/>
+              </a:spcBef>
+              <a:spcAft>
+                <a:spcPct val="0"/>
+              </a:spcAft>
+              <a:buClrTx/>
+              <a:buFontTx/>
+              <a:buChar char="•"/>
+            </a:pPr>
+            <a:r>
+              <a:rPr lang="en-US" altLang="en-US" sz="1200" dirty="0">
+                <a:solidFill>
+                  <a:schemeClr val="accent1"/>
+                </a:solidFill>
+                <a:latin typeface="Fira Code"/>
+                <a:ea typeface="Fira Code"/>
+                <a:cs typeface="Fira Code"/>
+              </a:rPr>
+              <a:t>90–100 → Excellent</a:t>
+            </a:r>
+          </a:p>
+          <a:p>
+            <a:pPr marL="457200" lvl="1" eaLnBrk="0" fontAlgn="base" hangingPunct="0">
+              <a:spcBef>
+                <a:spcPct val="0"/>
+              </a:spcBef>
+              <a:spcAft>
+                <a:spcPct val="0"/>
+              </a:spcAft>
+              <a:buClrTx/>
+              <a:buFontTx/>
+              <a:buChar char="•"/>
+            </a:pPr>
+            <a:r>
+              <a:rPr lang="en-US" altLang="en-US" sz="1200" dirty="0">
+                <a:solidFill>
+                  <a:schemeClr val="accent1"/>
+                </a:solidFill>
+                <a:latin typeface="Fira Code"/>
+                <a:ea typeface="Fira Code"/>
+                <a:cs typeface="Fira Code"/>
+              </a:rPr>
+              <a:t>70–89 → Good</a:t>
+            </a:r>
+          </a:p>
+          <a:p>
+            <a:pPr marL="457200" lvl="1" eaLnBrk="0" fontAlgn="base" hangingPunct="0">
+              <a:spcBef>
+                <a:spcPct val="0"/>
+              </a:spcBef>
+              <a:spcAft>
+                <a:spcPct val="0"/>
+              </a:spcAft>
+              <a:buClrTx/>
+              <a:buFontTx/>
+              <a:buChar char="•"/>
+            </a:pPr>
+            <a:r>
+              <a:rPr lang="en-US" altLang="en-US" sz="1200" dirty="0">
+                <a:solidFill>
+                  <a:schemeClr val="accent1"/>
+                </a:solidFill>
+                <a:latin typeface="Fira Code"/>
+                <a:ea typeface="Fira Code"/>
+                <a:cs typeface="Fira Code"/>
+              </a:rPr>
+              <a:t>50–69 → Pass</a:t>
+            </a:r>
+          </a:p>
+          <a:p>
+            <a:pPr marL="457200" lvl="1" eaLnBrk="0" fontAlgn="base" hangingPunct="0">
+              <a:spcBef>
+                <a:spcPct val="0"/>
+              </a:spcBef>
+              <a:spcAft>
+                <a:spcPct val="0"/>
+              </a:spcAft>
+              <a:buClrTx/>
+              <a:buFontTx/>
+              <a:buChar char="•"/>
+            </a:pPr>
+            <a:r>
+              <a:rPr lang="en-US" altLang="en-US" sz="1200" dirty="0">
+                <a:solidFill>
+                  <a:schemeClr val="accent1"/>
+                </a:solidFill>
+                <a:latin typeface="Fira Code"/>
+                <a:ea typeface="Fira Code"/>
+                <a:cs typeface="Fira Code"/>
+              </a:rPr>
+              <a:t>Below 50 → Fail</a:t>
+            </a:r>
+          </a:p>
+          <a:p>
+            <a:pPr marL="457200" lvl="1" eaLnBrk="0" fontAlgn="base" hangingPunct="0">
+              <a:spcBef>
+                <a:spcPct val="0"/>
+              </a:spcBef>
+              <a:spcAft>
+                <a:spcPct val="0"/>
+              </a:spcAft>
+              <a:buClrTx/>
+              <a:buFontTx/>
+              <a:buChar char="•"/>
+            </a:pPr>
+            <a:endParaRPr lang="en-US" altLang="en-US" sz="1200" dirty="0">
+              <a:solidFill>
+                <a:schemeClr val="accent1"/>
+              </a:solidFill>
+              <a:latin typeface="Fira Code"/>
+              <a:ea typeface="Fira Code"/>
+              <a:cs typeface="Fira Code"/>
+            </a:endParaRPr>
+          </a:p>
+          <a:p>
+            <a:pPr lvl="0" eaLnBrk="0" fontAlgn="base" hangingPunct="0">
+              <a:spcBef>
+                <a:spcPct val="0"/>
+              </a:spcBef>
+              <a:spcAft>
+                <a:spcPct val="0"/>
+              </a:spcAft>
+              <a:buClrTx/>
+              <a:buFontTx/>
+              <a:buChar char="•"/>
+            </a:pPr>
+            <a:r>
+              <a:rPr lang="en-US" altLang="en-US" sz="1200" dirty="0">
+                <a:solidFill>
+                  <a:schemeClr val="accent1"/>
+                </a:solidFill>
+                <a:latin typeface="Fira Code"/>
+                <a:ea typeface="Fira Code"/>
+                <a:cs typeface="Fira Code"/>
+              </a:rPr>
+              <a:t>For final:</a:t>
+            </a:r>
+          </a:p>
+          <a:p>
+            <a:pPr marL="457200" lvl="1" eaLnBrk="0" fontAlgn="base" hangingPunct="0">
+              <a:spcBef>
+                <a:spcPct val="0"/>
+              </a:spcBef>
+              <a:spcAft>
+                <a:spcPct val="0"/>
+              </a:spcAft>
+              <a:buClrTx/>
+              <a:buFontTx/>
+              <a:buChar char="•"/>
+            </a:pPr>
+            <a:r>
+              <a:rPr lang="en-US" altLang="en-US" sz="1200" dirty="0">
+                <a:solidFill>
+                  <a:schemeClr val="accent1"/>
+                </a:solidFill>
+                <a:latin typeface="Fira Code"/>
+                <a:ea typeface="Fira Code"/>
+                <a:cs typeface="Fira Code"/>
+              </a:rPr>
+              <a:t>90–100 → Outstanding</a:t>
+            </a:r>
+          </a:p>
+          <a:p>
+            <a:pPr marL="457200" lvl="1" eaLnBrk="0" fontAlgn="base" hangingPunct="0">
+              <a:spcBef>
+                <a:spcPct val="0"/>
+              </a:spcBef>
+              <a:spcAft>
+                <a:spcPct val="0"/>
+              </a:spcAft>
+              <a:buClrTx/>
+              <a:buFontTx/>
+              <a:buChar char="•"/>
+            </a:pPr>
+            <a:r>
+              <a:rPr lang="en-US" altLang="en-US" sz="1200" dirty="0">
+                <a:solidFill>
+                  <a:schemeClr val="accent1"/>
+                </a:solidFill>
+                <a:latin typeface="Fira Code"/>
+                <a:ea typeface="Fira Code"/>
+                <a:cs typeface="Fira Code"/>
+              </a:rPr>
+              <a:t>60–89 → Pass</a:t>
+            </a:r>
+          </a:p>
+          <a:p>
+            <a:pPr marL="457200" lvl="1" eaLnBrk="0" fontAlgn="base" hangingPunct="0">
+              <a:spcBef>
+                <a:spcPct val="0"/>
+              </a:spcBef>
+              <a:spcAft>
+                <a:spcPct val="0"/>
+              </a:spcAft>
+              <a:buClrTx/>
+              <a:buFontTx/>
+              <a:buChar char="•"/>
+            </a:pPr>
+            <a:r>
+              <a:rPr lang="en-US" altLang="en-US" sz="1200" dirty="0">
+                <a:solidFill>
+                  <a:schemeClr val="accent1"/>
+                </a:solidFill>
+                <a:latin typeface="Fira Code"/>
+                <a:ea typeface="Fira Code"/>
+                <a:cs typeface="Fira Code"/>
+              </a:rPr>
+              <a:t>Below 60 → Fail</a:t>
+            </a:r>
+          </a:p>
+          <a:p>
+            <a:pPr marL="457200" lvl="1" eaLnBrk="0" fontAlgn="base" hangingPunct="0">
+              <a:spcBef>
+                <a:spcPct val="0"/>
+              </a:spcBef>
+              <a:spcAft>
+                <a:spcPct val="0"/>
+              </a:spcAft>
+              <a:buClrTx/>
+              <a:buFontTx/>
+              <a:buChar char="•"/>
+            </a:pPr>
+            <a:endParaRPr lang="en-US" altLang="en-US" sz="1200" dirty="0">
+              <a:solidFill>
+                <a:schemeClr val="accent1"/>
+              </a:solidFill>
+              <a:latin typeface="Fira Code"/>
+              <a:ea typeface="Fira Code"/>
+              <a:cs typeface="Fira Code"/>
+            </a:endParaRPr>
+          </a:p>
+          <a:p>
+            <a:pPr lvl="0" eaLnBrk="0" fontAlgn="base" hangingPunct="0">
+              <a:spcBef>
+                <a:spcPct val="0"/>
+              </a:spcBef>
+              <a:spcAft>
+                <a:spcPct val="0"/>
+              </a:spcAft>
+              <a:buClrTx/>
+              <a:buFontTx/>
+              <a:buChar char="•"/>
+            </a:pPr>
+            <a:r>
+              <a:rPr lang="en-US" altLang="en-US" sz="1200" dirty="0">
+                <a:solidFill>
+                  <a:schemeClr val="accent1"/>
+                </a:solidFill>
+                <a:latin typeface="Fira Code"/>
+                <a:ea typeface="Fira Code"/>
+                <a:cs typeface="Fira Code"/>
+              </a:rPr>
+              <a:t>For quiz:</a:t>
+            </a:r>
+          </a:p>
+          <a:p>
+            <a:pPr marL="457200" lvl="1" eaLnBrk="0" fontAlgn="base" hangingPunct="0">
+              <a:spcBef>
+                <a:spcPct val="0"/>
+              </a:spcBef>
+              <a:spcAft>
+                <a:spcPct val="0"/>
+              </a:spcAft>
+              <a:buClrTx/>
+              <a:buFontTx/>
+              <a:buChar char="•"/>
+            </a:pPr>
+            <a:r>
+              <a:rPr lang="en-US" altLang="en-US" sz="1200" dirty="0">
+                <a:solidFill>
+                  <a:schemeClr val="accent1"/>
+                </a:solidFill>
+                <a:latin typeface="Fira Code"/>
+                <a:ea typeface="Fira Code"/>
+                <a:cs typeface="Fira Code"/>
+              </a:rPr>
+              <a:t>80–100 → Great</a:t>
+            </a:r>
+          </a:p>
+          <a:p>
+            <a:pPr marL="457200" lvl="1" eaLnBrk="0" fontAlgn="base" hangingPunct="0">
+              <a:spcBef>
+                <a:spcPct val="0"/>
+              </a:spcBef>
+              <a:spcAft>
+                <a:spcPct val="0"/>
+              </a:spcAft>
+              <a:buClrTx/>
+              <a:buFontTx/>
+              <a:buChar char="•"/>
+            </a:pPr>
+            <a:r>
+              <a:rPr lang="en-US" altLang="en-US" sz="1200" dirty="0">
+                <a:solidFill>
+                  <a:schemeClr val="accent1"/>
+                </a:solidFill>
+                <a:latin typeface="Fira Code"/>
+                <a:ea typeface="Fira Code"/>
+                <a:cs typeface="Fira Code"/>
+              </a:rPr>
+              <a:t>50–79 → Acceptable</a:t>
+            </a:r>
+          </a:p>
+          <a:p>
+            <a:pPr marL="457200" lvl="1" eaLnBrk="0" fontAlgn="base" hangingPunct="0">
+              <a:spcBef>
+                <a:spcPct val="0"/>
+              </a:spcBef>
+              <a:spcAft>
+                <a:spcPct val="0"/>
+              </a:spcAft>
+              <a:buClrTx/>
+              <a:buFontTx/>
+              <a:buChar char="•"/>
+            </a:pPr>
+            <a:r>
+              <a:rPr lang="en-US" altLang="en-US" sz="1200" dirty="0">
+                <a:solidFill>
+                  <a:schemeClr val="accent1"/>
+                </a:solidFill>
+                <a:latin typeface="Fira Code"/>
+                <a:ea typeface="Fira Code"/>
+                <a:cs typeface="Fira Code"/>
+              </a:rPr>
+              <a:t>Below 50 → Fail</a:t>
+            </a:r>
+          </a:p>
+          <a:p>
+            <a:pPr marL="457200" lvl="1" eaLnBrk="0" fontAlgn="base" hangingPunct="0">
+              <a:spcBef>
+                <a:spcPct val="0"/>
+              </a:spcBef>
+              <a:spcAft>
+                <a:spcPct val="0"/>
+              </a:spcAft>
+              <a:buClrTx/>
+              <a:buFontTx/>
+              <a:buChar char="•"/>
+            </a:pPr>
+            <a:endParaRPr lang="en-US" altLang="en-US" sz="1200" dirty="0">
+              <a:solidFill>
+                <a:schemeClr val="accent1"/>
+              </a:solidFill>
+              <a:latin typeface="Fira Code"/>
+              <a:ea typeface="Fira Code"/>
+              <a:cs typeface="Fira Code"/>
+            </a:endParaRPr>
+          </a:p>
+          <a:p>
+            <a:pPr lvl="0" eaLnBrk="0" fontAlgn="base" hangingPunct="0">
+              <a:spcBef>
+                <a:spcPct val="0"/>
+              </a:spcBef>
+              <a:spcAft>
+                <a:spcPct val="0"/>
+              </a:spcAft>
+              <a:buClrTx/>
+            </a:pPr>
+            <a:r>
+              <a:rPr lang="en-US" altLang="en-US" sz="1200" dirty="0">
+                <a:solidFill>
+                  <a:schemeClr val="accent1"/>
+                </a:solidFill>
+                <a:latin typeface="Fira Code"/>
+                <a:ea typeface="Fira Code"/>
+                <a:cs typeface="Fira Code"/>
+              </a:rPr>
+              <a:t>If the exam type is invalid, print:</a:t>
+            </a:r>
+            <a:br>
+              <a:rPr lang="en-US" altLang="en-US" sz="1200" dirty="0">
+                <a:solidFill>
+                  <a:schemeClr val="accent1"/>
+                </a:solidFill>
+                <a:latin typeface="Fira Code"/>
+                <a:ea typeface="Fira Code"/>
+                <a:cs typeface="Fira Code"/>
+              </a:rPr>
+            </a:br>
+            <a:r>
+              <a:rPr lang="en-US" altLang="en-US" sz="1200" dirty="0">
+                <a:solidFill>
+                  <a:schemeClr val="accent1"/>
+                </a:solidFill>
+                <a:latin typeface="Fira Code"/>
+                <a:ea typeface="Fira Code"/>
+                <a:cs typeface="Fira Code"/>
+              </a:rPr>
+              <a:t>"Invalid exam type."</a:t>
+            </a:r>
+            <a:br>
+              <a:rPr lang="en-US" altLang="en-US" sz="1200" dirty="0">
+                <a:solidFill>
+                  <a:schemeClr val="accent1"/>
+                </a:solidFill>
+                <a:latin typeface="Fira Code"/>
+                <a:ea typeface="Fira Code"/>
+                <a:cs typeface="Fira Code"/>
+              </a:rPr>
+            </a:br>
+            <a:r>
+              <a:rPr lang="en-US" altLang="en-US" sz="1200" dirty="0">
+                <a:solidFill>
+                  <a:schemeClr val="accent1"/>
+                </a:solidFill>
+                <a:latin typeface="Fira Code"/>
+                <a:ea typeface="Fira Code"/>
+                <a:cs typeface="Fira Code"/>
+              </a:rPr>
+              <a:t>If the score is not between 0 and 100, print:</a:t>
+            </a:r>
+            <a:br>
+              <a:rPr lang="en-US" altLang="en-US" sz="1200" dirty="0">
+                <a:solidFill>
+                  <a:schemeClr val="accent1"/>
+                </a:solidFill>
+                <a:latin typeface="Fira Code"/>
+                <a:ea typeface="Fira Code"/>
+                <a:cs typeface="Fira Code"/>
+              </a:rPr>
+            </a:br>
+            <a:r>
+              <a:rPr lang="en-US" altLang="en-US" sz="1200" dirty="0">
+                <a:solidFill>
+                  <a:schemeClr val="accent1"/>
+                </a:solidFill>
+                <a:latin typeface="Fira Code"/>
+                <a:ea typeface="Fira Code"/>
+                <a:cs typeface="Fira Code"/>
+              </a:rPr>
+              <a:t>"Invalid score."</a:t>
+            </a:r>
+          </a:p>
+        </p:txBody>
+      </p:sp>
+      <p:sp>
+        <p:nvSpPr>
+          <p:cNvPr id="3" name="Google Shape;473;p28">
+            <a:extLst>
+              <a:ext uri="{FF2B5EF4-FFF2-40B4-BE49-F238E27FC236}">
+                <a16:creationId xmlns:a16="http://schemas.microsoft.com/office/drawing/2014/main" id="{008761FA-83C6-5259-1428-4A14A0365D4F}"/>
+              </a:ext>
+            </a:extLst>
+          </p:cNvPr>
+          <p:cNvSpPr txBox="1">
+            <a:spLocks/>
+          </p:cNvSpPr>
+          <p:nvPr/>
+        </p:nvSpPr>
+        <p:spPr>
+          <a:xfrm>
+            <a:off x="8433850" y="4694675"/>
+            <a:ext cx="421081" cy="357300"/>
+          </a:xfrm>
+          <a:prstGeom prst="rect">
+            <a:avLst/>
+          </a:prstGeom>
+          <a:noFill/>
+          <a:ln>
+            <a:noFill/>
+          </a:ln>
+        </p:spPr>
+        <p:txBody>
+          <a:bodyPr spcFirstLastPara="1" wrap="square" lIns="91425" tIns="91425" rIns="91425" bIns="91425" anchor="ctr" anchorCtr="0">
+            <a:noAutofit/>
+          </a:bodyPr>
+          <a:lstStyle>
+            <a:defPPr marR="0" lvl="0" algn="l" rtl="0">
+              <a:lnSpc>
+                <a:spcPct val="100000"/>
+              </a:lnSpc>
+              <a:spcBef>
+                <a:spcPts val="0"/>
+              </a:spcBef>
+              <a:spcAft>
+                <a:spcPts val="0"/>
+              </a:spcAft>
+            </a:defPPr>
+            <a:lvl1pPr marL="457200" marR="0" lvl="0" indent="-317500" algn="l" rtl="0">
+              <a:lnSpc>
+                <a:spcPct val="100000"/>
+              </a:lnSpc>
+              <a:spcBef>
+                <a:spcPts val="0"/>
+              </a:spcBef>
+              <a:spcAft>
+                <a:spcPts val="0"/>
+              </a:spcAft>
+              <a:buClr>
+                <a:schemeClr val="dk2"/>
+              </a:buClr>
+              <a:buSzPts val="1400"/>
+              <a:buFont typeface="Fira Code"/>
+              <a:buChar char="●"/>
+              <a:defRPr sz="1400" b="0" i="0" u="none" strike="noStrike" cap="none">
+                <a:solidFill>
+                  <a:schemeClr val="dk2"/>
+                </a:solidFill>
+                <a:latin typeface="Fira Code"/>
+                <a:ea typeface="Fira Code"/>
+                <a:cs typeface="Fira Code"/>
+                <a:sym typeface="Fira Code"/>
+              </a:defRPr>
+            </a:lvl1pPr>
+            <a:lvl2pPr marL="914400" marR="0" lvl="1" indent="-317500" algn="l" rtl="0">
+              <a:lnSpc>
+                <a:spcPct val="100000"/>
+              </a:lnSpc>
+              <a:spcBef>
+                <a:spcPts val="0"/>
+              </a:spcBef>
+              <a:spcAft>
+                <a:spcPts val="0"/>
+              </a:spcAft>
+              <a:buClr>
+                <a:schemeClr val="dk2"/>
+              </a:buClr>
+              <a:buSzPts val="1400"/>
+              <a:buFont typeface="Fira Code"/>
+              <a:buChar char="○"/>
+              <a:defRPr sz="1400" b="0" i="0" u="none" strike="noStrike" cap="none">
+                <a:solidFill>
+                  <a:schemeClr val="dk2"/>
+                </a:solidFill>
+                <a:latin typeface="Fira Code"/>
+                <a:ea typeface="Fira Code"/>
+                <a:cs typeface="Fira Code"/>
+                <a:sym typeface="Fira Code"/>
+              </a:defRPr>
+            </a:lvl2pPr>
+            <a:lvl3pPr marL="1371600" marR="0" lvl="2" indent="-317500" algn="l" rtl="0">
+              <a:lnSpc>
+                <a:spcPct val="100000"/>
+              </a:lnSpc>
+              <a:spcBef>
+                <a:spcPts val="0"/>
+              </a:spcBef>
+              <a:spcAft>
+                <a:spcPts val="0"/>
+              </a:spcAft>
+              <a:buClr>
+                <a:schemeClr val="dk2"/>
+              </a:buClr>
+              <a:buSzPts val="1400"/>
+              <a:buFont typeface="Fira Code"/>
+              <a:buChar char="■"/>
+              <a:defRPr sz="1400" b="0" i="0" u="none" strike="noStrike" cap="none">
+                <a:solidFill>
+                  <a:schemeClr val="dk2"/>
+                </a:solidFill>
+                <a:latin typeface="Fira Code"/>
+                <a:ea typeface="Fira Code"/>
+                <a:cs typeface="Fira Code"/>
+                <a:sym typeface="Fira Code"/>
+              </a:defRPr>
+            </a:lvl3pPr>
+            <a:lvl4pPr marL="1828800" marR="0" lvl="3" indent="-317500" algn="l" rtl="0">
+              <a:lnSpc>
+                <a:spcPct val="100000"/>
+              </a:lnSpc>
+              <a:spcBef>
+                <a:spcPts val="0"/>
+              </a:spcBef>
+              <a:spcAft>
+                <a:spcPts val="0"/>
+              </a:spcAft>
+              <a:buClr>
+                <a:schemeClr val="dk2"/>
+              </a:buClr>
+              <a:buSzPts val="1400"/>
+              <a:buFont typeface="Fira Code"/>
+              <a:buChar char="●"/>
+              <a:defRPr sz="1400" b="0" i="0" u="none" strike="noStrike" cap="none">
+                <a:solidFill>
+                  <a:schemeClr val="dk2"/>
+                </a:solidFill>
+                <a:latin typeface="Fira Code"/>
+                <a:ea typeface="Fira Code"/>
+                <a:cs typeface="Fira Code"/>
+                <a:sym typeface="Fira Code"/>
+              </a:defRPr>
+            </a:lvl4pPr>
+            <a:lvl5pPr marL="2286000" marR="0" lvl="4" indent="-317500" algn="l" rtl="0">
+              <a:lnSpc>
+                <a:spcPct val="100000"/>
+              </a:lnSpc>
+              <a:spcBef>
+                <a:spcPts val="0"/>
+              </a:spcBef>
+              <a:spcAft>
+                <a:spcPts val="0"/>
+              </a:spcAft>
+              <a:buClr>
+                <a:schemeClr val="dk2"/>
+              </a:buClr>
+              <a:buSzPts val="1400"/>
+              <a:buFont typeface="Fira Code"/>
+              <a:buChar char="○"/>
+              <a:defRPr sz="1400" b="0" i="0" u="none" strike="noStrike" cap="none">
+                <a:solidFill>
+                  <a:schemeClr val="dk2"/>
+                </a:solidFill>
+                <a:latin typeface="Fira Code"/>
+                <a:ea typeface="Fira Code"/>
+                <a:cs typeface="Fira Code"/>
+                <a:sym typeface="Fira Code"/>
+              </a:defRPr>
+            </a:lvl5pPr>
+            <a:lvl6pPr marL="2743200" marR="0" lvl="5" indent="-317500" algn="l" rtl="0">
+              <a:lnSpc>
+                <a:spcPct val="100000"/>
+              </a:lnSpc>
+              <a:spcBef>
+                <a:spcPts val="0"/>
+              </a:spcBef>
+              <a:spcAft>
+                <a:spcPts val="0"/>
+              </a:spcAft>
+              <a:buClr>
+                <a:schemeClr val="dk2"/>
+              </a:buClr>
+              <a:buSzPts val="1400"/>
+              <a:buFont typeface="Fira Code"/>
+              <a:buChar char="■"/>
+              <a:defRPr sz="1400" b="0" i="0" u="none" strike="noStrike" cap="none">
+                <a:solidFill>
+                  <a:schemeClr val="dk2"/>
+                </a:solidFill>
+                <a:latin typeface="Fira Code"/>
+                <a:ea typeface="Fira Code"/>
+                <a:cs typeface="Fira Code"/>
+                <a:sym typeface="Fira Code"/>
+              </a:defRPr>
+            </a:lvl6pPr>
+            <a:lvl7pPr marL="3200400" marR="0" lvl="6" indent="-317500" algn="l" rtl="0">
+              <a:lnSpc>
+                <a:spcPct val="100000"/>
+              </a:lnSpc>
+              <a:spcBef>
+                <a:spcPts val="0"/>
+              </a:spcBef>
+              <a:spcAft>
+                <a:spcPts val="0"/>
+              </a:spcAft>
+              <a:buClr>
+                <a:schemeClr val="dk2"/>
+              </a:buClr>
+              <a:buSzPts val="1400"/>
+              <a:buFont typeface="Fira Code"/>
+              <a:buChar char="●"/>
+              <a:defRPr sz="1400" b="0" i="0" u="none" strike="noStrike" cap="none">
+                <a:solidFill>
+                  <a:schemeClr val="dk2"/>
+                </a:solidFill>
+                <a:latin typeface="Fira Code"/>
+                <a:ea typeface="Fira Code"/>
+                <a:cs typeface="Fira Code"/>
+                <a:sym typeface="Fira Code"/>
+              </a:defRPr>
+            </a:lvl7pPr>
+            <a:lvl8pPr marL="3657600" marR="0" lvl="7" indent="-317500" algn="l" rtl="0">
+              <a:lnSpc>
+                <a:spcPct val="100000"/>
+              </a:lnSpc>
+              <a:spcBef>
+                <a:spcPts val="0"/>
+              </a:spcBef>
+              <a:spcAft>
+                <a:spcPts val="0"/>
+              </a:spcAft>
+              <a:buClr>
+                <a:schemeClr val="dk2"/>
+              </a:buClr>
+              <a:buSzPts val="1400"/>
+              <a:buFont typeface="Fira Code"/>
+              <a:buChar char="○"/>
+              <a:defRPr sz="1400" b="0" i="0" u="none" strike="noStrike" cap="none">
+                <a:solidFill>
+                  <a:schemeClr val="dk2"/>
+                </a:solidFill>
+                <a:latin typeface="Fira Code"/>
+                <a:ea typeface="Fira Code"/>
+                <a:cs typeface="Fira Code"/>
+                <a:sym typeface="Fira Code"/>
+              </a:defRPr>
+            </a:lvl8pPr>
+            <a:lvl9pPr marL="4114800" marR="0" lvl="8" indent="-317500" algn="l" rtl="0">
+              <a:lnSpc>
+                <a:spcPct val="100000"/>
+              </a:lnSpc>
+              <a:spcBef>
+                <a:spcPts val="0"/>
+              </a:spcBef>
+              <a:spcAft>
+                <a:spcPts val="0"/>
+              </a:spcAft>
+              <a:buClr>
+                <a:schemeClr val="dk2"/>
+              </a:buClr>
+              <a:buSzPts val="1400"/>
+              <a:buFont typeface="Fira Code"/>
+              <a:buChar char="■"/>
+              <a:defRPr sz="1400" b="0" i="0" u="none" strike="noStrike" cap="none">
+                <a:solidFill>
+                  <a:schemeClr val="dk2"/>
+                </a:solidFill>
+                <a:latin typeface="Fira Code"/>
+                <a:ea typeface="Fira Code"/>
+                <a:cs typeface="Fira Code"/>
+                <a:sym typeface="Fira Code"/>
+              </a:defRPr>
+            </a:lvl9pPr>
+          </a:lstStyle>
+          <a:p>
+            <a:pPr marL="0" indent="0">
+              <a:buFont typeface="Fira Code"/>
+              <a:buNone/>
+            </a:pPr>
+            <a:r>
+              <a:rPr lang="en" sz="1100" dirty="0">
+                <a:solidFill>
+                  <a:schemeClr val="accent3"/>
+                </a:solidFill>
+              </a:rPr>
+              <a:t>1</a:t>
+            </a:r>
+            <a:r>
+              <a:rPr lang="fa-IR" sz="1100" dirty="0">
+                <a:solidFill>
+                  <a:schemeClr val="accent3"/>
+                </a:solidFill>
+              </a:rPr>
+              <a:t>1</a:t>
+            </a:r>
+            <a:endParaRPr lang="en" dirty="0">
+              <a:solidFill>
+                <a:schemeClr val="accent3"/>
+              </a:solidFill>
+            </a:endParaRPr>
+          </a:p>
+        </p:txBody>
+      </p:sp>
+      <p:sp>
+        <p:nvSpPr>
+          <p:cNvPr id="7" name="Rectangle: Rounded Corners 6">
+            <a:extLst>
+              <a:ext uri="{FF2B5EF4-FFF2-40B4-BE49-F238E27FC236}">
+                <a16:creationId xmlns:a16="http://schemas.microsoft.com/office/drawing/2014/main" id="{57E797FB-9023-2936-CAF7-5FF0938EC42E}"/>
+              </a:ext>
+            </a:extLst>
+          </p:cNvPr>
+          <p:cNvSpPr/>
+          <p:nvPr/>
+        </p:nvSpPr>
+        <p:spPr>
+          <a:xfrm>
+            <a:off x="5020350" y="2094272"/>
+            <a:ext cx="3834581" cy="849507"/>
+          </a:xfrm>
+          <a:prstGeom prst="roundRect">
+            <a:avLst/>
+          </a:prstGeom>
+          <a:solidFill>
+            <a:schemeClr val="accent5"/>
+          </a:solidFill>
+          <a:ln>
+            <a:noFill/>
+          </a:ln>
+        </p:spPr>
+        <p:style>
+          <a:lnRef idx="0">
+            <a:scrgbClr r="0" g="0" b="0"/>
+          </a:lnRef>
+          <a:fillRef idx="0">
+            <a:scrgbClr r="0" g="0" b="0"/>
+          </a:fillRef>
+          <a:effectRef idx="0">
+            <a:scrgbClr r="0" g="0" b="0"/>
+          </a:effectRef>
+          <a:fontRef idx="minor">
+            <a:schemeClr val="lt1"/>
+          </a:fontRef>
+        </p:style>
+        <p:txBody>
+          <a:bodyPr rtlCol="0" anchor="ctr"/>
+          <a:lstStyle/>
+          <a:p>
+            <a:r>
+              <a:rPr lang="en-US" sz="1200" dirty="0"/>
+              <a:t>Enter exam type (M/F/Q): F  </a:t>
+            </a:r>
+          </a:p>
+          <a:p>
+            <a:r>
+              <a:rPr lang="en-US" sz="1200" dirty="0"/>
+              <a:t>Enter score: 91  </a:t>
+            </a:r>
+          </a:p>
+          <a:p>
+            <a:r>
+              <a:rPr lang="en-US" sz="1200" dirty="0"/>
+              <a:t>Output: Outstanding</a:t>
+            </a:r>
+          </a:p>
+        </p:txBody>
+      </p:sp>
+      <p:sp>
+        <p:nvSpPr>
+          <p:cNvPr id="9" name="TextBox 8">
+            <a:extLst>
+              <a:ext uri="{FF2B5EF4-FFF2-40B4-BE49-F238E27FC236}">
+                <a16:creationId xmlns:a16="http://schemas.microsoft.com/office/drawing/2014/main" id="{400EF6D8-1AE8-4B4C-1E18-19D30F8757F2}"/>
+              </a:ext>
+            </a:extLst>
+          </p:cNvPr>
+          <p:cNvSpPr txBox="1"/>
+          <p:nvPr/>
+        </p:nvSpPr>
+        <p:spPr>
+          <a:xfrm>
+            <a:off x="4940709" y="1811373"/>
+            <a:ext cx="2118141" cy="276999"/>
+          </a:xfrm>
+          <a:prstGeom prst="rect">
+            <a:avLst/>
+          </a:prstGeom>
+          <a:noFill/>
+        </p:spPr>
+        <p:txBody>
+          <a:bodyPr wrap="square">
+            <a:spAutoFit/>
+          </a:bodyPr>
+          <a:lstStyle/>
+          <a:p>
+            <a:r>
+              <a:rPr lang="en-US" sz="1200" dirty="0">
+                <a:solidFill>
+                  <a:schemeClr val="accent1"/>
+                </a:solidFill>
+              </a:rPr>
+              <a:t>Sample Inputs/Outputs:</a:t>
+            </a:r>
+          </a:p>
+        </p:txBody>
+      </p:sp>
+    </p:spTree>
+    <p:extLst>
+      <p:ext uri="{BB962C8B-B14F-4D97-AF65-F5344CB8AC3E}">
+        <p14:creationId xmlns:p14="http://schemas.microsoft.com/office/powerpoint/2010/main" val="3903395559"/>
       </p:ext>
     </p:extLst>
   </p:cSld>

--- a/slides/4.Decision/Decision.pptx
+++ b/slides/4.Decision/Decision.pptx
@@ -11039,22 +11039,14 @@
           </a:bodyPr>
           <a:lstStyle/>
           <a:p>
-            <a:pPr marL="0" lvl="0" indent="0" algn="l" rtl="0">
-              <a:spcBef>
-                <a:spcPts val="0"/>
-              </a:spcBef>
-              <a:spcAft>
-                <a:spcPts val="0"/>
-              </a:spcAft>
-              <a:buNone/>
-            </a:pPr>
-            <a:r>
-              <a:rPr lang="en-US" dirty="0">
+            <a:pPr lvl="0"/>
+            <a:r>
+              <a:rPr lang="en-US">
                 <a:solidFill>
                   <a:schemeClr val="accent2"/>
                 </a:solidFill>
               </a:rPr>
-              <a:t>Home Work</a:t>
+              <a:t>Homework</a:t>
             </a:r>
             <a:endParaRPr dirty="0">
               <a:solidFill>
@@ -11394,7 +11386,7 @@
             <a:r>
               <a:rPr lang="en-US" altLang="en-US" sz="1200" dirty="0">
                 <a:solidFill>
-                  <a:schemeClr val="accent1"/>
+                  <a:schemeClr val="accent2"/>
                 </a:solidFill>
                 <a:latin typeface="Fira Code"/>
                 <a:ea typeface="Fira Code"/>
@@ -11418,7 +11410,7 @@
             <a:r>
               <a:rPr lang="en-US" altLang="en-US" sz="1200" dirty="0">
                 <a:solidFill>
-                  <a:schemeClr val="accent1"/>
+                  <a:schemeClr val="accent2"/>
                 </a:solidFill>
                 <a:latin typeface="Fira Code"/>
                 <a:ea typeface="Fira Code"/>
@@ -11442,7 +11434,7 @@
             <a:r>
               <a:rPr lang="en-US" altLang="en-US" sz="1200" dirty="0">
                 <a:solidFill>
-                  <a:schemeClr val="accent1"/>
+                  <a:schemeClr val="accent2"/>
                 </a:solidFill>
                 <a:latin typeface="Fira Code"/>
                 <a:ea typeface="Fira Code"/>
@@ -12054,7 +12046,7 @@
             <a:r>
               <a:rPr lang="en-US" altLang="en-US" sz="1200" dirty="0">
                 <a:solidFill>
-                  <a:schemeClr val="accent1"/>
+                  <a:schemeClr val="accent2"/>
                 </a:solidFill>
                 <a:latin typeface="Fira Code"/>
                 <a:ea typeface="Fira Code"/>
@@ -12078,7 +12070,7 @@
             <a:r>
               <a:rPr lang="en-US" altLang="en-US" sz="1200" dirty="0">
                 <a:solidFill>
-                  <a:schemeClr val="accent1"/>
+                  <a:schemeClr val="accent2"/>
                 </a:solidFill>
                 <a:latin typeface="Fira Code"/>
                 <a:ea typeface="Fira Code"/>
@@ -12102,7 +12094,7 @@
             <a:r>
               <a:rPr lang="en-US" altLang="en-US" sz="1200" dirty="0">
                 <a:solidFill>
-                  <a:schemeClr val="accent1"/>
+                  <a:schemeClr val="accent2"/>
                 </a:solidFill>
                 <a:latin typeface="Fira Code"/>
                 <a:ea typeface="Fira Code"/>
@@ -12126,7 +12118,7 @@
             <a:r>
               <a:rPr lang="en-US" altLang="en-US" sz="1200" dirty="0">
                 <a:solidFill>
-                  <a:schemeClr val="accent1"/>
+                  <a:schemeClr val="accent2"/>
                 </a:solidFill>
                 <a:latin typeface="Fira Code"/>
                 <a:ea typeface="Fira Code"/>
@@ -12195,7 +12187,7 @@
             <a:r>
               <a:rPr lang="en-US" altLang="en-US" sz="1200" dirty="0">
                 <a:solidFill>
-                  <a:schemeClr val="accent1"/>
+                  <a:schemeClr val="accent2"/>
                 </a:solidFill>
                 <a:latin typeface="Fira Code"/>
                 <a:ea typeface="Fira Code"/>
@@ -12219,7 +12211,7 @@
             <a:r>
               <a:rPr lang="en-US" altLang="en-US" sz="1200" dirty="0">
                 <a:solidFill>
-                  <a:schemeClr val="accent1"/>
+                  <a:schemeClr val="accent2"/>
                 </a:solidFill>
                 <a:latin typeface="Fira Code"/>
                 <a:ea typeface="Fira Code"/>
@@ -12243,7 +12235,7 @@
             <a:r>
               <a:rPr lang="en-US" altLang="en-US" sz="1200" dirty="0">
                 <a:solidFill>
-                  <a:schemeClr val="accent1"/>
+                  <a:schemeClr val="accent2"/>
                 </a:solidFill>
                 <a:latin typeface="Fira Code"/>
                 <a:ea typeface="Fira Code"/>
@@ -12312,7 +12304,7 @@
             <a:r>
               <a:rPr lang="en-US" altLang="en-US" sz="1200" dirty="0">
                 <a:solidFill>
-                  <a:schemeClr val="accent1"/>
+                  <a:schemeClr val="accent2"/>
                 </a:solidFill>
                 <a:latin typeface="Fira Code"/>
                 <a:ea typeface="Fira Code"/>
@@ -12336,7 +12328,7 @@
             <a:r>
               <a:rPr lang="en-US" altLang="en-US" sz="1200" dirty="0">
                 <a:solidFill>
-                  <a:schemeClr val="accent1"/>
+                  <a:schemeClr val="accent2"/>
                 </a:solidFill>
                 <a:latin typeface="Fira Code"/>
                 <a:ea typeface="Fira Code"/>
@@ -12360,7 +12352,7 @@
             <a:r>
               <a:rPr lang="en-US" altLang="en-US" sz="1200" dirty="0">
                 <a:solidFill>
-                  <a:schemeClr val="accent1"/>
+                  <a:schemeClr val="accent2"/>
                 </a:solidFill>
                 <a:latin typeface="Fira Code"/>
                 <a:ea typeface="Fira Code"/>
@@ -12403,7 +12395,7 @@
             <a:r>
               <a:rPr lang="en-US" altLang="en-US" sz="1200" dirty="0">
                 <a:solidFill>
-                  <a:schemeClr val="accent1"/>
+                  <a:schemeClr val="accent3"/>
                 </a:solidFill>
                 <a:latin typeface="Fira Code"/>
                 <a:ea typeface="Fira Code"/>
@@ -12414,7 +12406,7 @@
             <a:br>
               <a:rPr lang="en-US" altLang="en-US" sz="1200" dirty="0">
                 <a:solidFill>
-                  <a:schemeClr val="accent1"/>
+                  <a:schemeClr val="accent3"/>
                 </a:solidFill>
                 <a:latin typeface="Fira Code"/>
                 <a:ea typeface="Fira Code"/>
@@ -12424,7 +12416,7 @@
             <a:r>
               <a:rPr lang="en-US" altLang="en-US" sz="1200" dirty="0">
                 <a:solidFill>
-                  <a:schemeClr val="accent1"/>
+                  <a:schemeClr val="accent3"/>
                 </a:solidFill>
                 <a:latin typeface="Fira Code"/>
                 <a:ea typeface="Fira Code"/>
@@ -12435,7 +12427,7 @@
             <a:br>
               <a:rPr lang="en-US" altLang="en-US" sz="1200" dirty="0">
                 <a:solidFill>
-                  <a:schemeClr val="accent1"/>
+                  <a:schemeClr val="accent3"/>
                 </a:solidFill>
                 <a:latin typeface="Fira Code"/>
                 <a:ea typeface="Fira Code"/>
@@ -12445,7 +12437,7 @@
             <a:r>
               <a:rPr lang="en-US" altLang="en-US" sz="1200" dirty="0">
                 <a:solidFill>
-                  <a:schemeClr val="accent1"/>
+                  <a:schemeClr val="accent3"/>
                 </a:solidFill>
                 <a:latin typeface="Fira Code"/>
                 <a:ea typeface="Fira Code"/>
@@ -12456,7 +12448,7 @@
             <a:br>
               <a:rPr lang="en-US" altLang="en-US" sz="1200" dirty="0">
                 <a:solidFill>
-                  <a:schemeClr val="accent1"/>
+                  <a:schemeClr val="accent3"/>
                 </a:solidFill>
                 <a:latin typeface="Fira Code"/>
                 <a:ea typeface="Fira Code"/>
@@ -12466,7 +12458,7 @@
             <a:r>
               <a:rPr lang="en-US" altLang="en-US" sz="1200" dirty="0">
                 <a:solidFill>
-                  <a:schemeClr val="accent1"/>
+                  <a:schemeClr val="accent3"/>
                 </a:solidFill>
                 <a:latin typeface="Fira Code"/>
                 <a:ea typeface="Fira Code"/>

--- a/slides/4.Decision/Decision.pptx
+++ b/slides/4.Decision/Decision.pptx
@@ -11054,7 +11054,7 @@
                   <a:schemeClr val="accent2"/>
                 </a:solidFill>
               </a:rPr>
-              <a:t>Home Work</a:t>
+              <a:t>Homework</a:t>
             </a:r>
             <a:endParaRPr dirty="0">
               <a:solidFill>

--- a/slides/4.Decision/Decision.pptx
+++ b/slides/4.Decision/Decision.pptx
@@ -11219,7 +11219,7 @@
             <a:r>
               <a:rPr lang="en-US" altLang="en-US" sz="1200" dirty="0">
                 <a:solidFill>
-                  <a:schemeClr val="accent1"/>
+                  <a:schemeClr val="accent2"/>
                 </a:solidFill>
                 <a:latin typeface="Fira Code"/>
                 <a:ea typeface="Fira Code"/>
@@ -11237,6 +11237,138 @@
                 <a:spcPct val="0"/>
               </a:spcAft>
               <a:buClrTx/>
+            </a:pPr>
+            <a:endParaRPr lang="en-US" altLang="en-US" sz="1200" dirty="0">
+              <a:solidFill>
+                <a:schemeClr val="accent2"/>
+              </a:solidFill>
+              <a:latin typeface="Fira Code"/>
+              <a:ea typeface="Fira Code"/>
+              <a:cs typeface="Fira Code"/>
+            </a:endParaRPr>
+          </a:p>
+          <a:p>
+            <a:pPr lvl="0" algn="just" eaLnBrk="0" fontAlgn="base" hangingPunct="0">
+              <a:spcBef>
+                <a:spcPct val="0"/>
+              </a:spcBef>
+              <a:spcAft>
+                <a:spcPct val="0"/>
+              </a:spcAft>
+              <a:buClrTx/>
+            </a:pPr>
+            <a:r>
+              <a:rPr lang="en-US" altLang="en-US" sz="1200" dirty="0">
+                <a:solidFill>
+                  <a:schemeClr val="accent2"/>
+                </a:solidFill>
+                <a:latin typeface="Fira Code"/>
+                <a:ea typeface="Fira Code"/>
+                <a:cs typeface="Fira Code"/>
+              </a:rPr>
+              <a:t>Problem Statement:</a:t>
+            </a:r>
+          </a:p>
+          <a:p>
+            <a:pPr lvl="0" algn="just" eaLnBrk="0" fontAlgn="base" hangingPunct="0">
+              <a:spcBef>
+                <a:spcPct val="0"/>
+              </a:spcBef>
+              <a:spcAft>
+                <a:spcPct val="0"/>
+              </a:spcAft>
+              <a:buClrTx/>
+            </a:pPr>
+            <a:endParaRPr lang="en-US" altLang="en-US" sz="1200" dirty="0">
+              <a:solidFill>
+                <a:schemeClr val="accent2"/>
+              </a:solidFill>
+              <a:latin typeface="Fira Code"/>
+              <a:ea typeface="Fira Code"/>
+              <a:cs typeface="Fira Code"/>
+            </a:endParaRPr>
+          </a:p>
+          <a:p>
+            <a:pPr lvl="0" algn="just" eaLnBrk="0" fontAlgn="base" hangingPunct="0">
+              <a:spcBef>
+                <a:spcPct val="0"/>
+              </a:spcBef>
+              <a:spcAft>
+                <a:spcPct val="0"/>
+              </a:spcAft>
+              <a:buClrTx/>
+            </a:pPr>
+            <a:r>
+              <a:rPr lang="en-US" altLang="en-US" sz="1200" dirty="0">
+                <a:solidFill>
+                  <a:schemeClr val="accent2"/>
+                </a:solidFill>
+                <a:latin typeface="Fira Code"/>
+                <a:ea typeface="Fira Code"/>
+                <a:cs typeface="Fira Code"/>
+              </a:rPr>
+              <a:t>Write a C program that takes two inputs from the user:</a:t>
+            </a:r>
+          </a:p>
+          <a:p>
+            <a:pPr lvl="0" algn="just" eaLnBrk="0" fontAlgn="base" hangingPunct="0">
+              <a:spcBef>
+                <a:spcPct val="0"/>
+              </a:spcBef>
+              <a:spcAft>
+                <a:spcPct val="0"/>
+              </a:spcAft>
+              <a:buClrTx/>
+              <a:buFontTx/>
+              <a:buChar char="•"/>
+            </a:pPr>
+            <a:r>
+              <a:rPr lang="en-US" altLang="en-US" sz="1200" dirty="0">
+                <a:solidFill>
+                  <a:schemeClr val="accent2"/>
+                </a:solidFill>
+                <a:latin typeface="Fira Code"/>
+                <a:ea typeface="Fira Code"/>
+                <a:cs typeface="Fira Code"/>
+              </a:rPr>
+              <a:t>The score of a student (integer between 0 and 100)</a:t>
+            </a:r>
+          </a:p>
+          <a:p>
+            <a:pPr lvl="0" algn="just" eaLnBrk="0" fontAlgn="base" hangingPunct="0">
+              <a:spcBef>
+                <a:spcPct val="0"/>
+              </a:spcBef>
+              <a:spcAft>
+                <a:spcPct val="0"/>
+              </a:spcAft>
+              <a:buClrTx/>
+              <a:buFontTx/>
+              <a:buChar char="•"/>
+            </a:pPr>
+            <a:r>
+              <a:rPr lang="en-US" altLang="en-US" sz="1200" dirty="0">
+                <a:solidFill>
+                  <a:schemeClr val="accent2"/>
+                </a:solidFill>
+                <a:latin typeface="Fira Code"/>
+                <a:ea typeface="Fira Code"/>
+                <a:cs typeface="Fira Code"/>
+              </a:rPr>
+              <a:t>The type of exam:</a:t>
+            </a:r>
+          </a:p>
+          <a:p>
+            <a:pPr lvl="0" algn="just" eaLnBrk="0" fontAlgn="base" hangingPunct="0">
+              <a:spcBef>
+                <a:spcPct val="0"/>
+              </a:spcBef>
+              <a:spcAft>
+                <a:spcPct val="0"/>
+              </a:spcAft>
+              <a:buClrTx/>
+              <a:buFontTx/>
+              <a:buChar char="•"/>
             </a:pPr>
             <a:endParaRPr lang="en-US" altLang="en-US" sz="1200" dirty="0">
               <a:solidFill>
@@ -11248,6 +11380,78 @@
             </a:endParaRPr>
           </a:p>
           <a:p>
+            <a:pPr marL="457200" lvl="1" eaLnBrk="0" fontAlgn="base" hangingPunct="0">
+              <a:spcBef>
+                <a:spcPct val="0"/>
+              </a:spcBef>
+              <a:spcAft>
+                <a:spcPct val="0"/>
+              </a:spcAft>
+              <a:buClrTx/>
+              <a:buFontTx/>
+              <a:buChar char="•"/>
+            </a:pPr>
+            <a:r>
+              <a:rPr lang="en-US" altLang="en-US" sz="1200" dirty="0">
+                <a:solidFill>
+                  <a:schemeClr val="accent1"/>
+                </a:solidFill>
+                <a:latin typeface="Fira Code"/>
+                <a:ea typeface="Fira Code"/>
+                <a:cs typeface="Fira Code"/>
+              </a:rPr>
+              <a:t>'M' for midterm</a:t>
+            </a:r>
+          </a:p>
+          <a:p>
+            <a:pPr marL="457200" lvl="1" eaLnBrk="0" fontAlgn="base" hangingPunct="0">
+              <a:spcBef>
+                <a:spcPct val="0"/>
+              </a:spcBef>
+              <a:spcAft>
+                <a:spcPct val="0"/>
+              </a:spcAft>
+              <a:buClrTx/>
+              <a:buFontTx/>
+              <a:buChar char="•"/>
+            </a:pPr>
+            <a:r>
+              <a:rPr lang="en-US" altLang="en-US" sz="1200" dirty="0">
+                <a:solidFill>
+                  <a:schemeClr val="accent1"/>
+                </a:solidFill>
+                <a:latin typeface="Fira Code"/>
+                <a:ea typeface="Fira Code"/>
+                <a:cs typeface="Fira Code"/>
+              </a:rPr>
+              <a:t>'F' for final</a:t>
+            </a:r>
+          </a:p>
+          <a:p>
+            <a:pPr marL="457200" lvl="1" eaLnBrk="0" fontAlgn="base" hangingPunct="0">
+              <a:spcBef>
+                <a:spcPct val="0"/>
+              </a:spcBef>
+              <a:spcAft>
+                <a:spcPct val="0"/>
+              </a:spcAft>
+              <a:buClrTx/>
+              <a:buFontTx/>
+              <a:buChar char="•"/>
+            </a:pPr>
+            <a:r>
+              <a:rPr lang="en-US" altLang="en-US" sz="1200" dirty="0">
+                <a:solidFill>
+                  <a:schemeClr val="accent1"/>
+                </a:solidFill>
+                <a:latin typeface="Fira Code"/>
+                <a:ea typeface="Fira Code"/>
+                <a:cs typeface="Fira Code"/>
+              </a:rPr>
+              <a:t>'Q' for quiz</a:t>
+            </a:r>
+          </a:p>
+          <a:p>
             <a:pPr lvl="0" algn="just" eaLnBrk="0" fontAlgn="base" hangingPunct="0">
               <a:spcBef>
                 <a:spcPct val="0"/>
@@ -11256,28 +11460,8 @@
                 <a:spcPct val="0"/>
               </a:spcAft>
               <a:buClrTx/>
-            </a:pPr>
-            <a:r>
-              <a:rPr lang="en-US" altLang="en-US" sz="1200" dirty="0">
-                <a:solidFill>
-                  <a:schemeClr val="accent1"/>
-                </a:solidFill>
-                <a:latin typeface="Fira Code"/>
-                <a:ea typeface="Fira Code"/>
-                <a:cs typeface="Fira Code"/>
-              </a:rPr>
-              <a:t>Problem Statement:</a:t>
-            </a:r>
-          </a:p>
-          <a:p>
-            <a:pPr lvl="0" algn="just" eaLnBrk="0" fontAlgn="base" hangingPunct="0">
-              <a:spcBef>
-                <a:spcPct val="0"/>
-              </a:spcBef>
-              <a:spcAft>
-                <a:spcPct val="0"/>
-              </a:spcAft>
-              <a:buClrTx/>
+              <a:buFontTx/>
+              <a:buChar char="•"/>
             </a:pPr>
             <a:endParaRPr lang="en-US" altLang="en-US" sz="1200" dirty="0">
               <a:solidFill>
@@ -11289,7 +11473,7 @@
             </a:endParaRPr>
           </a:p>
           <a:p>
-            <a:pPr lvl="0" algn="just" eaLnBrk="0" fontAlgn="base" hangingPunct="0">
+            <a:pPr lvl="0" eaLnBrk="0" fontAlgn="base" hangingPunct="0">
               <a:spcBef>
                 <a:spcPct val="0"/>
               </a:spcBef>
@@ -11301,191 +11485,7 @@
             <a:r>
               <a:rPr lang="en-US" altLang="en-US" sz="1200" dirty="0">
                 <a:solidFill>
-                  <a:schemeClr val="accent1"/>
-                </a:solidFill>
-                <a:latin typeface="Fira Code"/>
-                <a:ea typeface="Fira Code"/>
-                <a:cs typeface="Fira Code"/>
-              </a:rPr>
-              <a:t>Write a C program that takes two inputs from the user:</a:t>
-            </a:r>
-          </a:p>
-          <a:p>
-            <a:pPr lvl="0" algn="just" eaLnBrk="0" fontAlgn="base" hangingPunct="0">
-              <a:spcBef>
-                <a:spcPct val="0"/>
-              </a:spcBef>
-              <a:spcAft>
-                <a:spcPct val="0"/>
-              </a:spcAft>
-              <a:buClrTx/>
-              <a:buFontTx/>
-              <a:buChar char="•"/>
-            </a:pPr>
-            <a:r>
-              <a:rPr lang="en-US" altLang="en-US" sz="1200" dirty="0">
-                <a:solidFill>
-                  <a:schemeClr val="accent1"/>
-                </a:solidFill>
-                <a:latin typeface="Fira Code"/>
-                <a:ea typeface="Fira Code"/>
-                <a:cs typeface="Fira Code"/>
-              </a:rPr>
-              <a:t>The score of a student (integer between 0 and 100)</a:t>
-            </a:r>
-          </a:p>
-          <a:p>
-            <a:pPr lvl="0" algn="just" eaLnBrk="0" fontAlgn="base" hangingPunct="0">
-              <a:spcBef>
-                <a:spcPct val="0"/>
-              </a:spcBef>
-              <a:spcAft>
-                <a:spcPct val="0"/>
-              </a:spcAft>
-              <a:buClrTx/>
-              <a:buFontTx/>
-              <a:buChar char="•"/>
-            </a:pPr>
-            <a:r>
-              <a:rPr lang="en-US" altLang="en-US" sz="1200" dirty="0">
-                <a:solidFill>
-                  <a:schemeClr val="accent1"/>
-                </a:solidFill>
-                <a:latin typeface="Fira Code"/>
-                <a:ea typeface="Fira Code"/>
-                <a:cs typeface="Fira Code"/>
-              </a:rPr>
-              <a:t>The type of exam:</a:t>
-            </a:r>
-          </a:p>
-          <a:p>
-            <a:pPr lvl="0" algn="just" eaLnBrk="0" fontAlgn="base" hangingPunct="0">
-              <a:spcBef>
-                <a:spcPct val="0"/>
-              </a:spcBef>
-              <a:spcAft>
-                <a:spcPct val="0"/>
-              </a:spcAft>
-              <a:buClrTx/>
-              <a:buFontTx/>
-              <a:buChar char="•"/>
-            </a:pPr>
-            <a:endParaRPr lang="en-US" altLang="en-US" sz="1200" dirty="0">
-              <a:solidFill>
-                <a:schemeClr val="accent1"/>
-              </a:solidFill>
-              <a:latin typeface="Fira Code"/>
-              <a:ea typeface="Fira Code"/>
-              <a:cs typeface="Fira Code"/>
-            </a:endParaRPr>
-          </a:p>
-          <a:p>
-            <a:pPr marL="457200" lvl="1" eaLnBrk="0" fontAlgn="base" hangingPunct="0">
-              <a:spcBef>
-                <a:spcPct val="0"/>
-              </a:spcBef>
-              <a:spcAft>
-                <a:spcPct val="0"/>
-              </a:spcAft>
-              <a:buClrTx/>
-              <a:buFontTx/>
-              <a:buChar char="•"/>
-            </a:pPr>
-            <a:r>
-              <a:rPr lang="en-US" altLang="en-US" sz="1200" dirty="0">
-                <a:solidFill>
-                  <a:schemeClr val="accent1"/>
-                </a:solidFill>
-                <a:latin typeface="Fira Code"/>
-                <a:ea typeface="Fira Code"/>
-                <a:cs typeface="Fira Code"/>
-              </a:rPr>
-              <a:t>'M' for midterm</a:t>
-            </a:r>
-          </a:p>
-          <a:p>
-            <a:pPr marL="457200" lvl="1" eaLnBrk="0" fontAlgn="base" hangingPunct="0">
-              <a:spcBef>
-                <a:spcPct val="0"/>
-              </a:spcBef>
-              <a:spcAft>
-                <a:spcPct val="0"/>
-              </a:spcAft>
-              <a:buClrTx/>
-              <a:buFontTx/>
-              <a:buChar char="•"/>
-            </a:pPr>
-            <a:r>
-              <a:rPr lang="en-US" altLang="en-US" sz="1200" dirty="0">
-                <a:solidFill>
-                  <a:schemeClr val="accent1"/>
-                </a:solidFill>
-                <a:latin typeface="Fira Code"/>
-                <a:ea typeface="Fira Code"/>
-                <a:cs typeface="Fira Code"/>
-              </a:rPr>
-              <a:t>'F' for final</a:t>
-            </a:r>
-          </a:p>
-          <a:p>
-            <a:pPr marL="457200" lvl="1" eaLnBrk="0" fontAlgn="base" hangingPunct="0">
-              <a:spcBef>
-                <a:spcPct val="0"/>
-              </a:spcBef>
-              <a:spcAft>
-                <a:spcPct val="0"/>
-              </a:spcAft>
-              <a:buClrTx/>
-              <a:buFontTx/>
-              <a:buChar char="•"/>
-            </a:pPr>
-            <a:r>
-              <a:rPr lang="en-US" altLang="en-US" sz="1200" dirty="0">
-                <a:solidFill>
-                  <a:schemeClr val="accent1"/>
-                </a:solidFill>
-                <a:latin typeface="Fira Code"/>
-                <a:ea typeface="Fira Code"/>
-                <a:cs typeface="Fira Code"/>
-              </a:rPr>
-              <a:t>'Q' for quiz</a:t>
-            </a:r>
-          </a:p>
-          <a:p>
-            <a:pPr lvl="0" algn="just" eaLnBrk="0" fontAlgn="base" hangingPunct="0">
-              <a:spcBef>
-                <a:spcPct val="0"/>
-              </a:spcBef>
-              <a:spcAft>
-                <a:spcPct val="0"/>
-              </a:spcAft>
-              <a:buClrTx/>
-              <a:buFontTx/>
-              <a:buChar char="•"/>
-            </a:pPr>
-            <a:endParaRPr lang="en-US" altLang="en-US" sz="1200" dirty="0">
-              <a:solidFill>
-                <a:schemeClr val="accent1"/>
-              </a:solidFill>
-              <a:latin typeface="Fira Code"/>
-              <a:ea typeface="Fira Code"/>
-              <a:cs typeface="Fira Code"/>
-            </a:endParaRPr>
-          </a:p>
-          <a:p>
-            <a:pPr lvl="0" eaLnBrk="0" fontAlgn="base" hangingPunct="0">
-              <a:spcBef>
-                <a:spcPct val="0"/>
-              </a:spcBef>
-              <a:spcAft>
-                <a:spcPct val="0"/>
-              </a:spcAft>
-              <a:buClrTx/>
-            </a:pPr>
-            <a:r>
-              <a:rPr lang="en-US" altLang="en-US" sz="1200" dirty="0">
-                <a:solidFill>
-                  <a:schemeClr val="accent1"/>
+                  <a:schemeClr val="accent2"/>
                 </a:solidFill>
                 <a:latin typeface="Fira Code"/>
                 <a:ea typeface="Fira Code"/>
@@ -12798,7 +12798,7 @@
         </p:nvSpPr>
         <p:spPr>
           <a:xfrm>
-            <a:off x="5020350" y="2094272"/>
+            <a:off x="4599269" y="2164521"/>
             <a:ext cx="3834581" cy="849507"/>
           </a:xfrm>
           <a:prstGeom prst="roundRect">
@@ -12862,7 +12862,7 @@
         </p:nvSpPr>
         <p:spPr>
           <a:xfrm>
-            <a:off x="4940709" y="1811373"/>
+            <a:off x="5377127" y="1807526"/>
             <a:ext cx="2118141" cy="276999"/>
           </a:xfrm>
           <a:prstGeom prst="rect">
@@ -12879,7 +12879,7 @@
             <a:r>
               <a:rPr lang="en-US" sz="1200" dirty="0">
                 <a:solidFill>
-                  <a:schemeClr val="accent1"/>
+                  <a:schemeClr val="accent2"/>
                 </a:solidFill>
               </a:rPr>
               <a:t>Sample Inputs/Outputs:</a:t>
